--- a/slaydlar/M10.pptx
+++ b/slaydlar/M10.pptx
@@ -20,6 +20,7 @@
     <p:sldId id="268" r:id="rId20"/>
     <p:sldId id="269" r:id="rId21"/>
     <p:sldId id="270" r:id="rId22"/>
+    <p:sldId id="271" r:id="rId23"/>
   </p:sldIdLst>
   <p:sldSz cx="12192000" cy="6858000" type="screen4x3"/>
   <p:notesSz cx="6858000" cy="9144000"/>
@@ -768,19 +769,25 @@
           <a:lstStyle/>
           <a:p>
             <a:r>
-              <a:t>Energiya ikki sababga ko'ra unumdorlik mezoni bo'ldi. Ma'lumot markazlarida u ekspluatatsiya xarajatining asosiy qismi va quvvat ta'minoti cheklovi: H100 SXM 700 vatt, 8 ta GPU'li DGX H100 esa 10 kilovattgacha iste'mol qiladi. Chekka qurilmalarda esa batareya va issiqlik chegaralari apparat imkoniyatini belgilaydi. Asosiy o'lchovlar: quvvat P (vatt, oniy), energiya E = ∫P dt (joul), bir inferensga energiya (J/inferens yoki mJ/inferens), energiya samaradorligi (inferens/J yoki TOPS/W), ma'lumot markazi uchun PUE (power usage effectiveness — umumiy iste'mol / IT iste'moli, zamonaviy markazlarda 1,1–1,3).</a:t>
+              <a:t>Roofline modeli (Williams, Waterman, Patterson, 2009) ish yukining erishishi mumkin bo'lgan unumdorligini ikki apparat parametri bilan bog'laydi: cho'qqi hisoblash tezligi P_peak (FLOP/s) va cho'qqi xotira o'tkazuvchanligi B_peak (bayt/s). Ish yukining xususiyati — arifmetik intensivlik (arithmetic intensity) I = FLOP soni / xotiradan o'qilgan va yozilgan baytlar soni (FLOP/bayt). Model shuni aytadiki, erishiladigan unumdorlik P = min(P_peak, I · B_peak). Grafikda (ikkala o'q logarifmik) bu ikki chiziq — qiya «xotira tomi» va gorizontal «hisoblash tomi» — uy tomini eslatadi, shundan nom kelib chiqqan. Ikki chiziq kesishgan nuqta — «tizma nuqtasi» (ridge point) I = P_peak / B_peak: intensivligi I dan kichik yadrolar xotira bilan cheklangan (memory-bound), kattalari hisoblash bilan cheklangan (compute-bound).</a:t>
             </a:r>
           </a:p>
           <a:p/>
           <a:p>
             <a:r>
-              <a:t>GPU quvvatini o'lchashning standart vositasi — nvidia-smi va uning asosidagi NVML kutubxonasi (pynvml Python paketi). nvidia-smi --query-gpu=power.draw,clocks.sm,temperature.gpu --format=csv -lms 100 har 100 millisekundda quvvat, chastota va haroratni yozadi. Shuni bilish kerakki, NVML quvvat o'lchovi butun plata uchun bo'lib, taxminan 5 foiz xatolikka ega va o'lchov oynasi 25–100 ms, shuning uchun juda qisqa yadrolarni alohida o'lchab bo'lmaydi — o'rtachalash kerak. Jetson platformalarida tegrastats yoki INA3221 sensorlari orqali CPU, GPU va xotira quvvati alohida o'lchanadi. Server darajasida PDU (quvvat taqsimlash bloki) ko'rsatkichlari to'liq tizim iste'molini beradi, chunki CPU, xotira, sovutish va tarmoq ham energiya sarflaydi — GPU odatda umumiy iste'molning 60–75 foizini tashkil etadi.</a:t>
+              <a:t>Zamonaviy tezlatkichlar uchun tizma nuqtasi hisoblab chiqamiz. A100 SXM 80 GB: FP16 tensor 312 TFLOPS, HBM2e 2039 GB/s → I ≈ 153 FLOP/bayt; FP32 (tensor yadrolarsiz) 19,5 TFLOPS → I ≈ 9,6. H100 SXM: FP16 989 TFLOPS, HBM3 3350 GB/s → I ≈ 295. NVIDIA T4: FP16 65 TFLOPS, GDDR6 320 GB/s → I ≈ 203. Jetson Orin AGX 64 GB: INT8 zich ~ 138 TOPS, LPDDR5 204,8 GB/s → I ≈ 670. Ko'rinib turibdiki, avlodlar almashgan sari hisoblash quvvati xotira o'tkazuvchanligidan tezroq o'sadi, tizma nuqtasi o'ngga suriladi va tobora ko'proq ish yuklari xotira bilan cheklanib qoladi — bu «xotira devori» (memory wall) muammosining Roofline tilidagi ifodasi.</a:t>
             </a:r>
           </a:p>
           <a:p/>
           <a:p>
             <a:r>
-              <a:t>Energiya va unumdorlik o'rtasida nochiziqli bog'liqlik bor. Dinamik quvvat chastota va kuchlanish kvadratiga proporsional (P ∝ f · V²), shuning uchun GPU chastotasini 10–15 foiz pasaytirish (nvidia-smi -pl bilan quvvat chegarasi yoki -lgc bilan chastota qulfi) unumdorlikni 5–8 foiz, quvvatni 20–30 foiz kamaytirishi mumkin — memory-bound ish yuklarida unumdorlik deyarli o'zgarmaydi, chunki to'siq xotirada. Shu sababli inferens serverlari ko'pincha ataylab pasaytirilgan quvvat chegarasida ishlaydi va «vatt boshiga throughput» maksimallashtiriladi. Aniqlikni pasaytirish ham energiyani tejaydi: Horowitz (2014) ma'lumotlariga ko'ra, 45 nm texnologiyada 32-bitli suzuvchi nuqtali ko'paytirish 3,7 pJ, 8-bitli butun sonli ko'paytirish 0,2 pJ, DRAM'dan 32 bit o'qish esa 640 pJ — ya'ni xotiraga murojaat arifmetikadan 100–1000 marta qimmat. Bu raqam Roofline bilan bir xil xulosaga olib keladi: energiya samaradorligining kaliti ham ma'lumot harakatini kamaytirishda.</a:t>
+              <a:t>Endi tipik yadrolarning intensivligini baholaymiz. M×K va K×N matritsalarni ko'paytirish 2MNK FLOP talab qiladi va FP16'da kamida 2(MK + KN + MN) bayt o'qiydi-yozadi. Kvadrat n×n holatda I = 2n³ / 6n² = n/3: n = 1024 da I ≈ 341, n = 4096 da I ≈ 1365 — A100'da aniq compute-bound. Biroq LLM dekodlashidagi partiya 1 holat matritsa-vektor ko'paytmasi (GEMV): M = 1, I = 2NK / 2(K + KN + N) ≈ 1 FLOP/bayt — tizma nuqtasidan 150 marta past, demak, qattiq memory-bound: GPU har tokenda butun og'irliklarni HBM'dan o'qiydi va hisoblash yadrolari 99 foiz bo'sh turadi. Shuning uchun LLM inferensida tokenlar/soniya taxminan B_peak / model_hajmi_baytlarda bilan chegaralanadi (masalan, 7 milliard parametrli FP16 model, 14 GB, A100'da ≈ 2039/14 ≈ 145 token/s partiya 1 uchun yuqori chegara). Elementar operatsiyalar (ReLU, qo'shish, LayerNorm) I ≈ 0,25–1 bilan hamma vaqt memory-bound; ularni matritsa ko'paytmasiga «birlashtirish» (kernel fusion) aynan shu sababdan samarali. Konvolyutsiya qatlamlari odatda yuqori intensivlikka ega (I yuzlab), lekin kichik partiyalarda va 1×1 konvolyutsiyalarda tushadi.</a:t>
+            </a:r>
+          </a:p>
+          <a:p/>
+          <a:p>
+            <a:r>
+              <a:t>Roofline ikki muhim kengaytmaga ega. Birinchisi — iyerarxik Roofline: har bir xotira darajasi (L1, L2, HBM, NVLink, PCIe) uchun alohida tom chiziladi va intensivlik shu daraja uchun hisoblanadi; bu kesh samaradorligini ko'rsatadi. Ikkinchisi — ko'p «shift» (ceiling): tensor yadrosiz FP32 tomi, FP16 tensor tomi, strukturaviy siyraklik tomi (A100'da 2:4 siyraklik bilan 624 TFLOPS). Modelning kuchi oddiyligida: u yadroning erishishi mumkin bo'lgan chegarasini ko'rsatadi va agar o'lchangan nuqta tomdan ancha pastda bo'lsa, muammo intensivlikda emas, balki yadro samaradorligida (band bo'lish, divergensiya, bank konfliktlari) ekanini aytadi. Agar nuqta xotira tomiga yaqin bo'lsa, yagona yo'l — intensivlikni oshirish: kvantlash (baytlar kamayadi), fusion, partiyani kattalashtirish, ma'lumotlarni qayta ishlatish (tiling).</a:t>
             </a:r>
           </a:p>
         </p:txBody>
@@ -806,6 +813,88 @@
 </file>
 
 <file path=ppt/notesSlides/notesSlide5.xml><?xml version="1.0" encoding="utf-8"?>
+<p:notes xmlns:a="http://schemas.openxmlformats.org/drawingml/2006/main" xmlns:p="http://schemas.openxmlformats.org/presentationml/2006/main" xmlns:r="http://schemas.openxmlformats.org/officeDocument/2006/relationships">
+  <p:cSld>
+    <p:spTree>
+      <p:nvGrpSpPr>
+        <p:cNvPr id="1" name=""/>
+        <p:cNvGrpSpPr/>
+        <p:nvPr/>
+      </p:nvGrpSpPr>
+      <p:grpSpPr>
+        <a:xfrm>
+          <a:off x="0" y="0"/>
+          <a:ext cx="0" cy="0"/>
+          <a:chOff x="0" y="0"/>
+          <a:chExt cx="0" cy="0"/>
+        </a:xfrm>
+      </p:grpSpPr>
+      <p:sp>
+        <p:nvSpPr>
+          <p:cNvPr id="2" name="Slide Image Placeholder 1"/>
+          <p:cNvSpPr>
+            <a:spLocks noGrp="1"/>
+          </p:cNvSpPr>
+          <p:nvPr>
+            <p:ph type="sldImg" idx="2"/>
+          </p:nvPr>
+        </p:nvSpPr>
+        <p:spPr/>
+      </p:sp>
+      <p:sp>
+        <p:nvSpPr>
+          <p:cNvPr id="3" name="Notes Placeholder 2"/>
+          <p:cNvSpPr>
+            <a:spLocks noGrp="1"/>
+          </p:cNvSpPr>
+          <p:nvPr>
+            <p:ph type="body" idx="3" sz="quarter"/>
+          </p:nvPr>
+        </p:nvSpPr>
+        <p:spPr/>
+        <p:txBody>
+          <a:bodyPr/>
+          <a:lstStyle/>
+          <a:p>
+            <a:r>
+              <a:t>Energiya ikki sababga ko'ra unumdorlik mezoni bo'ldi. Ma'lumot markazlarida u ekspluatatsiya xarajatining asosiy qismi va quvvat ta'minoti cheklovi: H100 SXM 700 vatt, 8 ta GPU'li DGX H100 esa 10 kilovattgacha iste'mol qiladi. Chekka qurilmalarda esa batareya va issiqlik chegaralari apparat imkoniyatini belgilaydi. Asosiy o'lchovlar: quvvat P (vatt, oniy), energiya E = ∫P dt (joul), bir inferensga energiya (J/inferens yoki mJ/inferens), energiya samaradorligi (inferens/J yoki TOPS/W), ma'lumot markazi uchun PUE (power usage effectiveness — umumiy iste'mol / IT iste'moli, zamonaviy markazlarda 1,1–1,3).</a:t>
+            </a:r>
+          </a:p>
+          <a:p/>
+          <a:p>
+            <a:r>
+              <a:t>GPU quvvatini o'lchashning standart vositasi — nvidia-smi va uning asosidagi NVML kutubxonasi (pynvml Python paketi). nvidia-smi --query-gpu=power.draw,clocks.sm,temperature.gpu --format=csv -lms 100 har 100 millisekundda quvvat, chastota va haroratni yozadi. Shuni bilish kerakki, NVML quvvat o'lchovi butun plata uchun bo'lib, taxminan 5 foiz xatolikka ega va o'lchov oynasi 25–100 ms, shuning uchun juda qisqa yadrolarni alohida o'lchab bo'lmaydi — o'rtachalash kerak. Jetson platformalarida tegrastats yoki INA3221 sensorlari orqali CPU, GPU va xotira quvvati alohida o'lchanadi. Server darajasida PDU (quvvat taqsimlash bloki) ko'rsatkichlari to'liq tizim iste'molini beradi, chunki CPU, xotira, sovutish va tarmoq ham energiya sarflaydi — GPU odatda umumiy iste'molning 60–75 foizini tashkil etadi.</a:t>
+            </a:r>
+          </a:p>
+          <a:p/>
+          <a:p>
+            <a:r>
+              <a:t>Energiya va unumdorlik o'rtasida nochiziqli bog'liqlik bor. Dinamik quvvat chastota va kuchlanish kvadratiga proporsional (P ∝ f · V²), shuning uchun GPU chastotasini 10–15 foiz pasaytirish (nvidia-smi -pl bilan quvvat chegarasi yoki -lgc bilan chastota qulfi) unumdorlikni 5–8 foiz, quvvatni 20–30 foiz kamaytirishi mumkin — memory-bound ish yuklarida unumdorlik deyarli o'zgarmaydi, chunki to'siq xotirada. Shu sababli inferens serverlari ko'pincha ataylab pasaytirilgan quvvat chegarasida ishlaydi va «vatt boshiga throughput» maksimallashtiriladi. Aniqlikni pasaytirish ham energiyani tejaydi: Horowitz (2014) ma'lumotlariga ko'ra, 45 nm texnologiyada 32-bitli suzuvchi nuqtali ko'paytirish 3,7 pJ, 8-bitli butun sonli ko'paytirish 0,2 pJ, DRAM'dan 32 bit o'qish esa 640 pJ — ya'ni xotiraga murojaat arifmetikadan 100–1000 marta qimmat. Bu raqam Roofline bilan bir xil xulosaga olib keladi: energiya samaradorligining kaliti ham ma'lumot harakatini kamaytirishda.</a:t>
+            </a:r>
+          </a:p>
+        </p:txBody>
+      </p:sp>
+      <p:sp>
+        <p:nvSpPr>
+          <p:cNvPr id="4" name="Slide Number Placeholder 3"/>
+          <p:cNvSpPr>
+            <a:spLocks noGrp="1"/>
+          </p:cNvSpPr>
+          <p:nvPr>
+            <p:ph type="sldNum" idx="5" sz="quarter"/>
+          </p:nvPr>
+        </p:nvSpPr>
+        <p:spPr/>
+      </p:sp>
+    </p:spTree>
+  </p:cSld>
+  <p:clrMapOvr>
+    <a:masterClrMapping/>
+  </p:clrMapOvr>
+</p:notes>
+</file>
+
+<file path=ppt/notesSlides/notesSlide6.xml><?xml version="1.0" encoding="utf-8"?>
 <p:notes xmlns:a="http://schemas.openxmlformats.org/drawingml/2006/main" xmlns:p="http://schemas.openxmlformats.org/presentationml/2006/main" xmlns:r="http://schemas.openxmlformats.org/officeDocument/2006/relationships">
   <p:cSld>
     <p:spTree>
@@ -5640,6 +5729,997 @@
                 <a:latin typeface="Calibri"/>
               </a:rPr>
               <a:t>10</a:t>
+            </a:r>
+          </a:p>
+        </p:txBody>
+      </p:sp>
+      <p:sp>
+        <p:nvSpPr>
+          <p:cNvPr id="10" name="Rounded Rectangle 9"/>
+          <p:cNvSpPr/>
+          <p:nvPr/>
+        </p:nvSpPr>
+        <p:spPr>
+          <a:xfrm>
+            <a:off x="550000" y="2897530"/>
+            <a:ext cx="11100000" cy="1754940"/>
+          </a:xfrm>
+          <a:prstGeom prst="roundRect">
+            <a:avLst>
+              <a:gd name="adj" fmla="val 8000"/>
+            </a:avLst>
+          </a:prstGeom>
+          <a:solidFill>
+            <a:srgbClr val="F5F8FC"/>
+          </a:solidFill>
+          <a:ln>
+            <a:noFill/>
+          </a:ln>
+          <a:effectLst/>
+        </p:spPr>
+        <p:style>
+          <a:lnRef idx="1">
+            <a:schemeClr val="accent1"/>
+          </a:lnRef>
+          <a:fillRef idx="3">
+            <a:schemeClr val="accent1"/>
+          </a:fillRef>
+          <a:effectRef idx="2">
+            <a:schemeClr val="accent1"/>
+          </a:effectRef>
+          <a:fontRef idx="minor">
+            <a:schemeClr val="lt1"/>
+          </a:fontRef>
+        </p:style>
+        <p:txBody>
+          <a:bodyPr rtlCol="0" anchor="ctr"/>
+          <a:lstStyle/>
+          <a:p>
+            <a:pPr algn="ctr"/>
+          </a:p>
+        </p:txBody>
+      </p:sp>
+      <p:sp>
+        <p:nvSpPr>
+          <p:cNvPr id="11" name="Rectangle 10"/>
+          <p:cNvSpPr/>
+          <p:nvPr/>
+        </p:nvSpPr>
+        <p:spPr>
+          <a:xfrm>
+            <a:off x="550000" y="2897530"/>
+            <a:ext cx="70000" cy="1754940"/>
+          </a:xfrm>
+          <a:prstGeom prst="rect">
+            <a:avLst/>
+          </a:prstGeom>
+          <a:solidFill>
+            <a:srgbClr val="B7791F"/>
+          </a:solidFill>
+          <a:ln>
+            <a:noFill/>
+          </a:ln>
+          <a:effectLst/>
+        </p:spPr>
+        <p:style>
+          <a:lnRef idx="1">
+            <a:schemeClr val="accent1"/>
+          </a:lnRef>
+          <a:fillRef idx="3">
+            <a:schemeClr val="accent1"/>
+          </a:fillRef>
+          <a:effectRef idx="2">
+            <a:schemeClr val="accent1"/>
+          </a:effectRef>
+          <a:fontRef idx="minor">
+            <a:schemeClr val="lt1"/>
+          </a:fontRef>
+        </p:style>
+        <p:txBody>
+          <a:bodyPr rtlCol="0" anchor="ctr"/>
+          <a:lstStyle/>
+          <a:p>
+            <a:pPr algn="ctr"/>
+          </a:p>
+        </p:txBody>
+      </p:sp>
+      <p:sp>
+        <p:nvSpPr>
+          <p:cNvPr id="12" name="Oval 11"/>
+          <p:cNvSpPr/>
+          <p:nvPr/>
+        </p:nvSpPr>
+        <p:spPr>
+          <a:xfrm>
+            <a:off x="780000" y="3565000"/>
+            <a:ext cx="420000" cy="420000"/>
+          </a:xfrm>
+          <a:prstGeom prst="ellipse">
+            <a:avLst/>
+          </a:prstGeom>
+          <a:solidFill>
+            <a:srgbClr val="B7791F"/>
+          </a:solidFill>
+          <a:ln>
+            <a:noFill/>
+          </a:ln>
+          <a:effectLst/>
+        </p:spPr>
+        <p:style>
+          <a:lnRef idx="1">
+            <a:schemeClr val="accent1"/>
+          </a:lnRef>
+          <a:fillRef idx="3">
+            <a:schemeClr val="accent1"/>
+          </a:fillRef>
+          <a:effectRef idx="2">
+            <a:schemeClr val="accent1"/>
+          </a:effectRef>
+          <a:fontRef idx="minor">
+            <a:schemeClr val="lt1"/>
+          </a:fontRef>
+        </p:style>
+        <p:txBody>
+          <a:bodyPr rtlCol="0" anchor="ctr" lIns="0" rIns="0"/>
+          <a:lstStyle/>
+          <a:p>
+            <a:pPr algn="ctr"/>
+            <a:r>
+              <a:rPr sz="1400" b="1">
+                <a:solidFill>
+                  <a:srgbClr val="FFFFFF"/>
+                </a:solidFill>
+                <a:latin typeface="Calibri"/>
+              </a:rPr>
+              <a:t>4</a:t>
+            </a:r>
+          </a:p>
+        </p:txBody>
+      </p:sp>
+      <p:sp>
+        <p:nvSpPr>
+          <p:cNvPr id="13" name="TextBox 12"/>
+          <p:cNvSpPr txBox="1"/>
+          <p:nvPr/>
+        </p:nvSpPr>
+        <p:spPr>
+          <a:xfrm>
+            <a:off x="1380000" y="2937530"/>
+            <a:ext cx="10150000" cy="1674940"/>
+          </a:xfrm>
+          <a:prstGeom prst="rect">
+            <a:avLst/>
+          </a:prstGeom>
+          <a:noFill/>
+        </p:spPr>
+        <p:txBody>
+          <a:bodyPr wrap="square" anchor="ctr">
+            <a:spAutoFit/>
+          </a:bodyPr>
+          <a:lstStyle/>
+          <a:p>
+            <a:r>
+              <a:rPr sz="1800" b="1">
+                <a:solidFill>
+                  <a:srgbClr val="1F3A5F"/>
+                </a:solidFill>
+                <a:latin typeface="Calibri"/>
+              </a:rPr>
+              <a:t>Roofline ikki muhim kengaytmaga ega.</a:t>
+            </a:r>
+          </a:p>
+          <a:p>
+            <a:pPr>
+              <a:spcBef>
+                <a:spcPts val="400"/>
+              </a:spcBef>
+            </a:pPr>
+            <a:r>
+              <a:rPr sz="1700">
+                <a:solidFill>
+                  <a:srgbClr val="334055"/>
+                </a:solidFill>
+                <a:latin typeface="Calibri"/>
+              </a:rPr>
+              <a:t>Birinchisi — iyerarxik Roofline: har bir xotira darajasi (L1, L2, HBM, NVLink, PCIe) uchun alohida tom chiziladi va intensivlik shu daraja uchun hisoblanadi; bu kesh samaradorligini ko'rsatadi. Ikkinchisi — ko'p «shift» (ceiling): tensor yadrosiz FP32 tomi, FP16 tensor tomi, strukturaviy siyraklik tomi (A100'da 2:4 siyraklik bilan 624 TFLOPS).</a:t>
+            </a:r>
+          </a:p>
+        </p:txBody>
+      </p:sp>
+    </p:spTree>
+  </p:cSld>
+  <p:clrMapOvr>
+    <a:masterClrMapping/>
+  </p:clrMapOvr>
+  <p:transition spd="med">
+    <p:fade/>
+  </p:transition>
+  <p:timing>
+    <p:tnLst>
+      <p:par>
+        <p:cTn id="1" dur="indefinite" restart="never" nodeType="tmRoot">
+          <p:childTnLst>
+            <p:seq concurrent="1" nextAc="seek">
+              <p:cTn id="2" dur="indefinite" nodeType="mainSeq">
+                <p:childTnLst>
+                  <p:par>
+                    <p:cTn id="31" fill="hold">
+                      <p:stCondLst>
+                        <p:cond delay="indefinite"/>
+                        <p:cond evt="onBegin" delay="0">
+                          <p:tn val="2"/>
+                        </p:cond>
+                      </p:stCondLst>
+                      <p:childTnLst>
+                        <p:par>
+                          <p:cTn id="3" fill="hold">
+                            <p:stCondLst>
+                              <p:cond delay="0"/>
+                            </p:stCondLst>
+                            <p:childTnLst>
+                              <p:par>
+                                <p:cTn id="4" presetID="10" presetClass="entr" presetSubtype="0" fill="hold" grpId="0" nodeType="withEffect">
+                                  <p:stCondLst>
+                                    <p:cond delay="0"/>
+                                  </p:stCondLst>
+                                  <p:childTnLst>
+                                    <p:set>
+                                      <p:cBhvr>
+                                        <p:cTn id="5" dur="1" fill="hold">
+                                          <p:stCondLst>
+                                            <p:cond delay="0"/>
+                                          </p:stCondLst>
+                                        </p:cTn>
+                                        <p:tgtEl>
+                                          <p:spTgt spid="6"/>
+                                        </p:tgtEl>
+                                        <p:attrNameLst>
+                                          <p:attrName>style.visibility</p:attrName>
+                                        </p:attrNameLst>
+                                      </p:cBhvr>
+                                      <p:to>
+                                        <p:strVal val="visible"/>
+                                      </p:to>
+                                    </p:set>
+                                    <p:animEffect transition="in" filter="fade">
+                                      <p:cBhvr>
+                                        <p:cTn id="6" dur="550"/>
+                                        <p:tgtEl>
+                                          <p:spTgt spid="6"/>
+                                        </p:tgtEl>
+                                      </p:cBhvr>
+                                    </p:animEffect>
+                                  </p:childTnLst>
+                                </p:cTn>
+                              </p:par>
+                            </p:childTnLst>
+                          </p:cTn>
+                        </p:par>
+                        <p:par>
+                          <p:cTn id="7" fill="hold">
+                            <p:stCondLst>
+                              <p:cond delay="220"/>
+                            </p:stCondLst>
+                            <p:childTnLst>
+                              <p:par>
+                                <p:cTn id="8" presetID="42" presetClass="entr" presetSubtype="0" fill="hold" grpId="0" nodeType="afterEffect">
+                                  <p:stCondLst>
+                                    <p:cond delay="0"/>
+                                  </p:stCondLst>
+                                  <p:childTnLst>
+                                    <p:set>
+                                      <p:cBhvr>
+                                        <p:cTn id="9" dur="1" fill="hold">
+                                          <p:stCondLst>
+                                            <p:cond delay="0"/>
+                                          </p:stCondLst>
+                                        </p:cTn>
+                                        <p:tgtEl>
+                                          <p:spTgt spid="10"/>
+                                        </p:tgtEl>
+                                        <p:attrNameLst>
+                                          <p:attrName>style.visibility</p:attrName>
+                                        </p:attrNameLst>
+                                      </p:cBhvr>
+                                      <p:to>
+                                        <p:strVal val="visible"/>
+                                      </p:to>
+                                    </p:set>
+                                    <p:animEffect transition="in" filter="fade">
+                                      <p:cBhvr>
+                                        <p:cTn id="10" dur="550"/>
+                                        <p:tgtEl>
+                                          <p:spTgt spid="10"/>
+                                        </p:tgtEl>
+                                      </p:cBhvr>
+                                    </p:animEffect>
+                                    <p:anim calcmode="lin" valueType="num">
+                                      <p:cBhvr additive="base">
+                                        <p:cTn id="11" dur="550" fill="hold"/>
+                                        <p:tgtEl>
+                                          <p:spTgt spid="10"/>
+                                        </p:tgtEl>
+                                        <p:attrNameLst>
+                                          <p:attrName>ppt_x</p:attrName>
+                                        </p:attrNameLst>
+                                      </p:cBhvr>
+                                      <p:tavLst>
+                                        <p:tav tm="0">
+                                          <p:val>
+                                            <p:strVal val="#ppt_x"/>
+                                          </p:val>
+                                        </p:tav>
+                                        <p:tav tm="100000">
+                                          <p:val>
+                                            <p:strVal val="#ppt_x"/>
+                                          </p:val>
+                                        </p:tav>
+                                      </p:tavLst>
+                                    </p:anim>
+                                    <p:anim calcmode="lin" valueType="num">
+                                      <p:cBhvr additive="base">
+                                        <p:cTn id="12" dur="550" fill="hold"/>
+                                        <p:tgtEl>
+                                          <p:spTgt spid="10"/>
+                                        </p:tgtEl>
+                                        <p:attrNameLst>
+                                          <p:attrName>ppt_y</p:attrName>
+                                        </p:attrNameLst>
+                                      </p:cBhvr>
+                                      <p:tavLst>
+                                        <p:tav tm="0">
+                                          <p:val>
+                                            <p:strVal val="#ppt_y+.08"/>
+                                          </p:val>
+                                        </p:tav>
+                                        <p:tav tm="100000">
+                                          <p:val>
+                                            <p:strVal val="#ppt_y"/>
+                                          </p:val>
+                                        </p:tav>
+                                      </p:tavLst>
+                                    </p:anim>
+                                  </p:childTnLst>
+                                </p:cTn>
+                              </p:par>
+                            </p:childTnLst>
+                          </p:cTn>
+                        </p:par>
+                        <p:par>
+                          <p:cTn id="13" fill="hold">
+                            <p:stCondLst>
+                              <p:cond delay="220"/>
+                            </p:stCondLst>
+                            <p:childTnLst>
+                              <p:par>
+                                <p:cTn id="14" presetID="42" presetClass="entr" presetSubtype="0" fill="hold" grpId="0" nodeType="afterEffect">
+                                  <p:stCondLst>
+                                    <p:cond delay="0"/>
+                                  </p:stCondLst>
+                                  <p:childTnLst>
+                                    <p:set>
+                                      <p:cBhvr>
+                                        <p:cTn id="15" dur="1" fill="hold">
+                                          <p:stCondLst>
+                                            <p:cond delay="0"/>
+                                          </p:stCondLst>
+                                        </p:cTn>
+                                        <p:tgtEl>
+                                          <p:spTgt spid="11"/>
+                                        </p:tgtEl>
+                                        <p:attrNameLst>
+                                          <p:attrName>style.visibility</p:attrName>
+                                        </p:attrNameLst>
+                                      </p:cBhvr>
+                                      <p:to>
+                                        <p:strVal val="visible"/>
+                                      </p:to>
+                                    </p:set>
+                                    <p:animEffect transition="in" filter="fade">
+                                      <p:cBhvr>
+                                        <p:cTn id="16" dur="550"/>
+                                        <p:tgtEl>
+                                          <p:spTgt spid="11"/>
+                                        </p:tgtEl>
+                                      </p:cBhvr>
+                                    </p:animEffect>
+                                    <p:anim calcmode="lin" valueType="num">
+                                      <p:cBhvr additive="base">
+                                        <p:cTn id="17" dur="550" fill="hold"/>
+                                        <p:tgtEl>
+                                          <p:spTgt spid="11"/>
+                                        </p:tgtEl>
+                                        <p:attrNameLst>
+                                          <p:attrName>ppt_x</p:attrName>
+                                        </p:attrNameLst>
+                                      </p:cBhvr>
+                                      <p:tavLst>
+                                        <p:tav tm="0">
+                                          <p:val>
+                                            <p:strVal val="#ppt_x"/>
+                                          </p:val>
+                                        </p:tav>
+                                        <p:tav tm="100000">
+                                          <p:val>
+                                            <p:strVal val="#ppt_x"/>
+                                          </p:val>
+                                        </p:tav>
+                                      </p:tavLst>
+                                    </p:anim>
+                                    <p:anim calcmode="lin" valueType="num">
+                                      <p:cBhvr additive="base">
+                                        <p:cTn id="18" dur="550" fill="hold"/>
+                                        <p:tgtEl>
+                                          <p:spTgt spid="11"/>
+                                        </p:tgtEl>
+                                        <p:attrNameLst>
+                                          <p:attrName>ppt_y</p:attrName>
+                                        </p:attrNameLst>
+                                      </p:cBhvr>
+                                      <p:tavLst>
+                                        <p:tav tm="0">
+                                          <p:val>
+                                            <p:strVal val="#ppt_y+.08"/>
+                                          </p:val>
+                                        </p:tav>
+                                        <p:tav tm="100000">
+                                          <p:val>
+                                            <p:strVal val="#ppt_y"/>
+                                          </p:val>
+                                        </p:tav>
+                                      </p:tavLst>
+                                    </p:anim>
+                                  </p:childTnLst>
+                                </p:cTn>
+                              </p:par>
+                            </p:childTnLst>
+                          </p:cTn>
+                        </p:par>
+                        <p:par>
+                          <p:cTn id="19" fill="hold">
+                            <p:stCondLst>
+                              <p:cond delay="220"/>
+                            </p:stCondLst>
+                            <p:childTnLst>
+                              <p:par>
+                                <p:cTn id="20" presetID="53" presetClass="entr" presetSubtype="16" fill="hold" grpId="0" nodeType="afterEffect">
+                                  <p:stCondLst>
+                                    <p:cond delay="0"/>
+                                  </p:stCondLst>
+                                  <p:childTnLst>
+                                    <p:set>
+                                      <p:cBhvr>
+                                        <p:cTn id="21" dur="1" fill="hold">
+                                          <p:stCondLst>
+                                            <p:cond delay="0"/>
+                                          </p:stCondLst>
+                                        </p:cTn>
+                                        <p:tgtEl>
+                                          <p:spTgt spid="12"/>
+                                        </p:tgtEl>
+                                        <p:attrNameLst>
+                                          <p:attrName>style.visibility</p:attrName>
+                                        </p:attrNameLst>
+                                      </p:cBhvr>
+                                      <p:to>
+                                        <p:strVal val="visible"/>
+                                      </p:to>
+                                    </p:set>
+                                    <p:animEffect transition="in" filter="fade">
+                                      <p:cBhvr>
+                                        <p:cTn id="22" dur="550"/>
+                                        <p:tgtEl>
+                                          <p:spTgt spid="12"/>
+                                        </p:tgtEl>
+                                      </p:cBhvr>
+                                    </p:animEffect>
+                                    <p:anim calcmode="lin" valueType="num">
+                                      <p:cBhvr additive="base">
+                                        <p:cTn id="23" dur="550" fill="hold"/>
+                                        <p:tgtEl>
+                                          <p:spTgt spid="12"/>
+                                        </p:tgtEl>
+                                        <p:attrNameLst>
+                                          <p:attrName>ppt_w</p:attrName>
+                                        </p:attrNameLst>
+                                      </p:cBhvr>
+                                      <p:tavLst>
+                                        <p:tav tm="0">
+                                          <p:val>
+                                            <p:strVal val="0"/>
+                                          </p:val>
+                                        </p:tav>
+                                        <p:tav tm="100000">
+                                          <p:val>
+                                            <p:strVal val="#ppt_w"/>
+                                          </p:val>
+                                        </p:tav>
+                                      </p:tavLst>
+                                    </p:anim>
+                                    <p:anim calcmode="lin" valueType="num">
+                                      <p:cBhvr additive="base">
+                                        <p:cTn id="24" dur="550" fill="hold"/>
+                                        <p:tgtEl>
+                                          <p:spTgt spid="12"/>
+                                        </p:tgtEl>
+                                        <p:attrNameLst>
+                                          <p:attrName>ppt_h</p:attrName>
+                                        </p:attrNameLst>
+                                      </p:cBhvr>
+                                      <p:tavLst>
+                                        <p:tav tm="0">
+                                          <p:val>
+                                            <p:strVal val="0"/>
+                                          </p:val>
+                                        </p:tav>
+                                        <p:tav tm="100000">
+                                          <p:val>
+                                            <p:strVal val="#ppt_h"/>
+                                          </p:val>
+                                        </p:tav>
+                                      </p:tavLst>
+                                    </p:anim>
+                                  </p:childTnLst>
+                                </p:cTn>
+                              </p:par>
+                            </p:childTnLst>
+                          </p:cTn>
+                        </p:par>
+                        <p:par>
+                          <p:cTn id="25" fill="hold">
+                            <p:stCondLst>
+                              <p:cond delay="220"/>
+                            </p:stCondLst>
+                            <p:childTnLst>
+                              <p:par>
+                                <p:cTn id="26" presetID="42" presetClass="entr" presetSubtype="0" fill="hold" grpId="0" nodeType="afterEffect">
+                                  <p:stCondLst>
+                                    <p:cond delay="0"/>
+                                  </p:stCondLst>
+                                  <p:childTnLst>
+                                    <p:set>
+                                      <p:cBhvr>
+                                        <p:cTn id="27" dur="1" fill="hold">
+                                          <p:stCondLst>
+                                            <p:cond delay="0"/>
+                                          </p:stCondLst>
+                                        </p:cTn>
+                                        <p:tgtEl>
+                                          <p:spTgt spid="13"/>
+                                        </p:tgtEl>
+                                        <p:attrNameLst>
+                                          <p:attrName>style.visibility</p:attrName>
+                                        </p:attrNameLst>
+                                      </p:cBhvr>
+                                      <p:to>
+                                        <p:strVal val="visible"/>
+                                      </p:to>
+                                    </p:set>
+                                    <p:animEffect transition="in" filter="fade">
+                                      <p:cBhvr>
+                                        <p:cTn id="28" dur="550"/>
+                                        <p:tgtEl>
+                                          <p:spTgt spid="13"/>
+                                        </p:tgtEl>
+                                      </p:cBhvr>
+                                    </p:animEffect>
+                                    <p:anim calcmode="lin" valueType="num">
+                                      <p:cBhvr additive="base">
+                                        <p:cTn id="29" dur="550" fill="hold"/>
+                                        <p:tgtEl>
+                                          <p:spTgt spid="13"/>
+                                        </p:tgtEl>
+                                        <p:attrNameLst>
+                                          <p:attrName>ppt_x</p:attrName>
+                                        </p:attrNameLst>
+                                      </p:cBhvr>
+                                      <p:tavLst>
+                                        <p:tav tm="0">
+                                          <p:val>
+                                            <p:strVal val="#ppt_x"/>
+                                          </p:val>
+                                        </p:tav>
+                                        <p:tav tm="100000">
+                                          <p:val>
+                                            <p:strVal val="#ppt_x"/>
+                                          </p:val>
+                                        </p:tav>
+                                      </p:tavLst>
+                                    </p:anim>
+                                    <p:anim calcmode="lin" valueType="num">
+                                      <p:cBhvr additive="base">
+                                        <p:cTn id="30" dur="550" fill="hold"/>
+                                        <p:tgtEl>
+                                          <p:spTgt spid="13"/>
+                                        </p:tgtEl>
+                                        <p:attrNameLst>
+                                          <p:attrName>ppt_y</p:attrName>
+                                        </p:attrNameLst>
+                                      </p:cBhvr>
+                                      <p:tavLst>
+                                        <p:tav tm="0">
+                                          <p:val>
+                                            <p:strVal val="#ppt_y+.08"/>
+                                          </p:val>
+                                        </p:tav>
+                                        <p:tav tm="100000">
+                                          <p:val>
+                                            <p:strVal val="#ppt_y"/>
+                                          </p:val>
+                                        </p:tav>
+                                      </p:tavLst>
+                                    </p:anim>
+                                  </p:childTnLst>
+                                </p:cTn>
+                              </p:par>
+                            </p:childTnLst>
+                          </p:cTn>
+                        </p:par>
+                      </p:childTnLst>
+                    </p:cTn>
+                  </p:par>
+                </p:childTnLst>
+              </p:cTn>
+              <p:prevCondLst>
+                <p:cond evt="onPrev" delay="0">
+                  <p:tgtEl>
+                    <p:sldTgt/>
+                  </p:tgtEl>
+                </p:cond>
+              </p:prevCondLst>
+              <p:nextCondLst>
+                <p:cond evt="onNext" delay="0">
+                  <p:tgtEl>
+                    <p:sldTgt/>
+                  </p:tgtEl>
+                </p:cond>
+              </p:nextCondLst>
+            </p:seq>
+          </p:childTnLst>
+        </p:cTn>
+      </p:par>
+    </p:tnLst>
+    <p:bldLst>
+      <p:bldP spid="6" grpId="0" animBg="1"/>
+      <p:bldP spid="10" grpId="0" animBg="1"/>
+      <p:bldP spid="11" grpId="0" animBg="1"/>
+      <p:bldP spid="12" grpId="0" animBg="1"/>
+      <p:bldP spid="13" grpId="0" animBg="1"/>
+    </p:bldLst>
+  </p:timing>
+</p:sld>
+</file>
+
+<file path=ppt/slides/slide11.xml><?xml version="1.0" encoding="utf-8"?>
+<p:sld xmlns:a="http://schemas.openxmlformats.org/drawingml/2006/main" xmlns:p="http://schemas.openxmlformats.org/presentationml/2006/main" xmlns:r="http://schemas.openxmlformats.org/officeDocument/2006/relationships">
+  <p:cSld>
+    <p:spTree>
+      <p:nvGrpSpPr>
+        <p:cNvPr id="1" name=""/>
+        <p:cNvGrpSpPr/>
+        <p:nvPr/>
+      </p:nvGrpSpPr>
+      <p:grpSpPr/>
+      <p:sp>
+        <p:nvSpPr>
+          <p:cNvPr id="2" name="Rectangle 1"/>
+          <p:cNvSpPr/>
+          <p:nvPr/>
+        </p:nvSpPr>
+        <p:spPr>
+          <a:xfrm>
+            <a:off x="0" y="0"/>
+            <a:ext cx="12192000" cy="1000000"/>
+          </a:xfrm>
+          <a:prstGeom prst="rect">
+            <a:avLst/>
+          </a:prstGeom>
+          <a:gradFill rotWithShape="1">
+            <a:gsLst>
+              <a:gs pos="0">
+                <a:srgbClr val="1F3A5F"/>
+              </a:gs>
+              <a:gs pos="100000">
+                <a:srgbClr val="2D5C8F"/>
+              </a:gs>
+            </a:gsLst>
+            <a:lin scaled="0" ang="0"/>
+          </a:gradFill>
+          <a:ln>
+            <a:noFill/>
+          </a:ln>
+          <a:effectLst/>
+        </p:spPr>
+        <p:style>
+          <a:lnRef idx="1">
+            <a:schemeClr val="accent1"/>
+          </a:lnRef>
+          <a:fillRef idx="3">
+            <a:schemeClr val="accent1"/>
+          </a:fillRef>
+          <a:effectRef idx="2">
+            <a:schemeClr val="accent1"/>
+          </a:effectRef>
+          <a:fontRef idx="minor">
+            <a:schemeClr val="lt1"/>
+          </a:fontRef>
+        </p:style>
+        <p:txBody>
+          <a:bodyPr rtlCol="0" anchor="ctr"/>
+          <a:lstStyle/>
+          <a:p>
+            <a:pPr algn="ctr"/>
+          </a:p>
+        </p:txBody>
+      </p:sp>
+      <p:sp>
+        <p:nvSpPr>
+          <p:cNvPr id="3" name="Oval 2"/>
+          <p:cNvSpPr/>
+          <p:nvPr/>
+        </p:nvSpPr>
+        <p:spPr>
+          <a:xfrm>
+            <a:off x="11050000" y="-350000"/>
+            <a:ext cx="900000" cy="900000"/>
+          </a:xfrm>
+          <a:prstGeom prst="ellipse">
+            <a:avLst/>
+          </a:prstGeom>
+          <a:solidFill>
+            <a:srgbClr val="3B6EA5"/>
+          </a:solidFill>
+          <a:ln>
+            <a:noFill/>
+          </a:ln>
+          <a:effectLst/>
+        </p:spPr>
+        <p:style>
+          <a:lnRef idx="1">
+            <a:schemeClr val="accent1"/>
+          </a:lnRef>
+          <a:fillRef idx="3">
+            <a:schemeClr val="accent1"/>
+          </a:fillRef>
+          <a:effectRef idx="2">
+            <a:schemeClr val="accent1"/>
+          </a:effectRef>
+          <a:fontRef idx="minor">
+            <a:schemeClr val="lt1"/>
+          </a:fontRef>
+        </p:style>
+        <p:txBody>
+          <a:bodyPr rtlCol="0" anchor="ctr"/>
+          <a:lstStyle/>
+          <a:p>
+            <a:pPr algn="ctr"/>
+          </a:p>
+        </p:txBody>
+      </p:sp>
+      <p:sp>
+        <p:nvSpPr>
+          <p:cNvPr id="4" name="Oval 3"/>
+          <p:cNvSpPr/>
+          <p:nvPr/>
+        </p:nvSpPr>
+        <p:spPr>
+          <a:xfrm>
+            <a:off x="11550000" y="450000"/>
+            <a:ext cx="420000" cy="420000"/>
+          </a:xfrm>
+          <a:prstGeom prst="ellipse">
+            <a:avLst/>
+          </a:prstGeom>
+          <a:solidFill>
+            <a:srgbClr val="0F8B8D"/>
+          </a:solidFill>
+          <a:ln>
+            <a:noFill/>
+          </a:ln>
+          <a:effectLst/>
+        </p:spPr>
+        <p:style>
+          <a:lnRef idx="1">
+            <a:schemeClr val="accent1"/>
+          </a:lnRef>
+          <a:fillRef idx="3">
+            <a:schemeClr val="accent1"/>
+          </a:fillRef>
+          <a:effectRef idx="2">
+            <a:schemeClr val="accent1"/>
+          </a:effectRef>
+          <a:fontRef idx="minor">
+            <a:schemeClr val="lt1"/>
+          </a:fontRef>
+        </p:style>
+        <p:txBody>
+          <a:bodyPr rtlCol="0" anchor="ctr"/>
+          <a:lstStyle/>
+          <a:p>
+            <a:pPr algn="ctr"/>
+          </a:p>
+        </p:txBody>
+      </p:sp>
+      <p:sp>
+        <p:nvSpPr>
+          <p:cNvPr id="5" name="TextBox 4"/>
+          <p:cNvSpPr txBox="1"/>
+          <p:nvPr/>
+        </p:nvSpPr>
+        <p:spPr>
+          <a:xfrm>
+            <a:off x="500000" y="110000"/>
+            <a:ext cx="10300000" cy="300000"/>
+          </a:xfrm>
+          <a:prstGeom prst="rect">
+            <a:avLst/>
+          </a:prstGeom>
+          <a:noFill/>
+        </p:spPr>
+        <p:txBody>
+          <a:bodyPr wrap="square" anchor="t" lIns="50800" rIns="50800">
+            <a:spAutoFit/>
+          </a:bodyPr>
+          <a:lstStyle/>
+          <a:p>
+            <a:pPr algn="l"/>
+            <a:r>
+              <a:rPr sz="1200" b="1">
+                <a:solidFill>
+                  <a:srgbClr val="A9C4E6"/>
+                </a:solidFill>
+                <a:latin typeface="Calibri"/>
+              </a:rPr>
+              <a:t>3-REJA</a:t>
+            </a:r>
+          </a:p>
+        </p:txBody>
+      </p:sp>
+      <p:sp>
+        <p:nvSpPr>
+          <p:cNvPr id="6" name="TextBox 5"/>
+          <p:cNvSpPr txBox="1"/>
+          <p:nvPr/>
+        </p:nvSpPr>
+        <p:spPr>
+          <a:xfrm>
+            <a:off x="500000" y="330000"/>
+            <a:ext cx="10400000" cy="650000"/>
+          </a:xfrm>
+          <a:prstGeom prst="rect">
+            <a:avLst/>
+          </a:prstGeom>
+          <a:noFill/>
+        </p:spPr>
+        <p:txBody>
+          <a:bodyPr wrap="square" anchor="ctr" lIns="50800" rIns="50800">
+            <a:spAutoFit/>
+          </a:bodyPr>
+          <a:lstStyle/>
+          <a:p>
+            <a:pPr algn="l"/>
+            <a:r>
+              <a:rPr sz="2600" b="1">
+                <a:solidFill>
+                  <a:srgbClr val="FFFFFF"/>
+                </a:solidFill>
+                <a:latin typeface="Calibri"/>
+              </a:rPr>
+              <a:t>Roofline modeli</a:t>
+            </a:r>
+          </a:p>
+        </p:txBody>
+      </p:sp>
+      <p:sp>
+        <p:nvSpPr>
+          <p:cNvPr id="7" name="Rectangle 6"/>
+          <p:cNvSpPr/>
+          <p:nvPr/>
+        </p:nvSpPr>
+        <p:spPr>
+          <a:xfrm>
+            <a:off x="0" y="1000000"/>
+            <a:ext cx="12192000" cy="45000"/>
+          </a:xfrm>
+          <a:prstGeom prst="rect">
+            <a:avLst/>
+          </a:prstGeom>
+          <a:solidFill>
+            <a:srgbClr val="0F8B8D"/>
+          </a:solidFill>
+          <a:ln>
+            <a:noFill/>
+          </a:ln>
+          <a:effectLst/>
+        </p:spPr>
+        <p:style>
+          <a:lnRef idx="1">
+            <a:schemeClr val="accent1"/>
+          </a:lnRef>
+          <a:fillRef idx="3">
+            <a:schemeClr val="accent1"/>
+          </a:fillRef>
+          <a:effectRef idx="2">
+            <a:schemeClr val="accent1"/>
+          </a:effectRef>
+          <a:fontRef idx="minor">
+            <a:schemeClr val="lt1"/>
+          </a:fontRef>
+        </p:style>
+        <p:txBody>
+          <a:bodyPr rtlCol="0" anchor="ctr"/>
+          <a:lstStyle/>
+          <a:p>
+            <a:pPr algn="ctr"/>
+          </a:p>
+        </p:txBody>
+      </p:sp>
+      <p:sp>
+        <p:nvSpPr>
+          <p:cNvPr id="8" name="TextBox 7"/>
+          <p:cNvSpPr txBox="1"/>
+          <p:nvPr/>
+        </p:nvSpPr>
+        <p:spPr>
+          <a:xfrm>
+            <a:off x="500000" y="6420000"/>
+            <a:ext cx="9500000" cy="300000"/>
+          </a:xfrm>
+          <a:prstGeom prst="rect">
+            <a:avLst/>
+          </a:prstGeom>
+          <a:noFill/>
+        </p:spPr>
+        <p:txBody>
+          <a:bodyPr wrap="square" anchor="t" lIns="50800" rIns="50800">
+            <a:spAutoFit/>
+          </a:bodyPr>
+          <a:lstStyle/>
+          <a:p>
+            <a:pPr algn="l"/>
+            <a:r>
+              <a:rPr sz="1000" b="0">
+                <a:solidFill>
+                  <a:srgbClr val="5B6878"/>
+                </a:solidFill>
+                <a:latin typeface="Calibri"/>
+              </a:rPr>
+              <a:t>M10 · Unumdorligini tahlil qilish va baholash</a:t>
+            </a:r>
+          </a:p>
+        </p:txBody>
+      </p:sp>
+      <p:sp>
+        <p:nvSpPr>
+          <p:cNvPr id="9" name="TextBox 8"/>
+          <p:cNvSpPr txBox="1"/>
+          <p:nvPr/>
+        </p:nvSpPr>
+        <p:spPr>
+          <a:xfrm>
+            <a:off x="10600000" y="6420000"/>
+            <a:ext cx="1100000" cy="300000"/>
+          </a:xfrm>
+          <a:prstGeom prst="rect">
+            <a:avLst/>
+          </a:prstGeom>
+          <a:noFill/>
+        </p:spPr>
+        <p:txBody>
+          <a:bodyPr wrap="square" anchor="t" lIns="50800" rIns="50800">
+            <a:spAutoFit/>
+          </a:bodyPr>
+          <a:lstStyle/>
+          <a:p>
+            <a:pPr algn="r"/>
+            <a:r>
+              <a:rPr sz="1000" b="0">
+                <a:solidFill>
+                  <a:srgbClr val="5B6878"/>
+                </a:solidFill>
+                <a:latin typeface="Calibri"/>
+              </a:rPr>
+              <a:t>11</a:t>
             </a:r>
           </a:p>
         </p:txBody>
@@ -6356,7 +7436,7 @@
 </p:sld>
 </file>
 
-<file path=ppt/slides/slide11.xml><?xml version="1.0" encoding="utf-8"?>
+<file path=ppt/slides/slide12.xml><?xml version="1.0" encoding="utf-8"?>
 <p:sld xmlns:a="http://schemas.openxmlformats.org/drawingml/2006/main" xmlns:p="http://schemas.openxmlformats.org/presentationml/2006/main" xmlns:r="http://schemas.openxmlformats.org/officeDocument/2006/relationships">
   <p:cSld>
     <p:spTree>
@@ -7268,7 +8348,7 @@
 </p:sld>
 </file>
 
-<file path=ppt/slides/slide12.xml><?xml version="1.0" encoding="utf-8"?>
+<file path=ppt/slides/slide13.xml><?xml version="1.0" encoding="utf-8"?>
 <p:sld xmlns:a="http://schemas.openxmlformats.org/drawingml/2006/main" xmlns:p="http://schemas.openxmlformats.org/presentationml/2006/main" xmlns:r="http://schemas.openxmlformats.org/officeDocument/2006/relationships">
   <p:cSld>
     <p:spTree>
@@ -7597,7 +8677,7 @@
                 </a:solidFill>
                 <a:latin typeface="Calibri"/>
               </a:rPr>
-              <a:t>12</a:t>
+              <a:t>13</a:t>
             </a:r>
           </a:p>
         </p:txBody>
@@ -7610,12 +8690,12 @@
         </p:nvSpPr>
         <p:spPr>
           <a:xfrm>
-            <a:off x="550000" y="1620000"/>
-            <a:ext cx="11100000" cy="1250000"/>
+            <a:off x="550000" y="1409780"/>
+            <a:ext cx="11100000" cy="1503480"/>
           </a:xfrm>
           <a:prstGeom prst="roundRect">
             <a:avLst>
-              <a:gd name="adj" fmla="val 18000"/>
+              <a:gd name="adj" fmla="val 8000"/>
             </a:avLst>
           </a:prstGeom>
           <a:solidFill>
@@ -7656,8 +8736,8 @@
         </p:nvSpPr>
         <p:spPr>
           <a:xfrm>
-            <a:off x="550000" y="1620000"/>
-            <a:ext cx="70000" cy="1250000"/>
+            <a:off x="550000" y="1409780"/>
+            <a:ext cx="70000" cy="1503480"/>
           </a:xfrm>
           <a:prstGeom prst="rect">
             <a:avLst/>
@@ -7700,8 +8780,8 @@
         </p:nvSpPr>
         <p:spPr>
           <a:xfrm>
-            <a:off x="800000" y="2015000"/>
-            <a:ext cx="460000" cy="460000"/>
+            <a:off x="780000" y="1951520"/>
+            <a:ext cx="420000" cy="420000"/>
           </a:xfrm>
           <a:prstGeom prst="ellipse">
             <a:avLst/>
@@ -7734,7 +8814,7 @@
           <a:p>
             <a:pPr algn="ctr"/>
             <a:r>
-              <a:rPr sz="1600" b="1">
+              <a:rPr sz="1400" b="1">
                 <a:solidFill>
                   <a:srgbClr val="FFFFFF"/>
                 </a:solidFill>
@@ -7753,8 +8833,8 @@
         </p:nvSpPr>
         <p:spPr>
           <a:xfrm>
-            <a:off x="1450000" y="1620000"/>
-            <a:ext cx="10050000" cy="1250000"/>
+            <a:off x="1380000" y="1449780"/>
+            <a:ext cx="10150000" cy="1423480"/>
           </a:xfrm>
           <a:prstGeom prst="rect">
             <a:avLst/>
@@ -7762,20 +8842,35 @@
           <a:noFill/>
         </p:spPr>
         <p:txBody>
-          <a:bodyPr wrap="square" anchor="ctr" lIns="50800" rIns="50800">
+          <a:bodyPr wrap="square" anchor="ctr">
             <a:spAutoFit/>
           </a:bodyPr>
           <a:lstStyle/>
           <a:p>
-            <a:pPr algn="l"/>
             <a:r>
-              <a:rPr sz="1600" b="0">
+              <a:rPr sz="1500" b="1">
                 <a:solidFill>
-                  <a:srgbClr val="1B2430"/>
+                  <a:srgbClr val="1F3A5F"/>
                 </a:solidFill>
                 <a:latin typeface="Calibri"/>
               </a:rPr>
-              <a:t>Energiya ikki sababga ko'ra unumdorlik mezoni bo'ldi. Ma'lumot markazlarida u ekspluatatsiya xarajatining asosiy qismi va quvvat ta'minoti cheklovi: H100 SXM 700 vatt, 8 ta GPU'li DGX H100 esa 10 kilovattgacha iste'mol qiladi.</a:t>
+              <a:t>Energiya ikki sababga ko'ra unumdorlik mezoni bo'ldi.</a:t>
+            </a:r>
+          </a:p>
+          <a:p>
+            <a:pPr>
+              <a:spcBef>
+                <a:spcPts val="400"/>
+              </a:spcBef>
+            </a:pPr>
+            <a:r>
+              <a:rPr sz="1400">
+                <a:solidFill>
+                  <a:srgbClr val="334055"/>
+                </a:solidFill>
+                <a:latin typeface="Calibri"/>
+              </a:rPr>
+              <a:t>Ma'lumot markazlarida u ekspluatatsiya xarajatining asosiy qismi va quvvat ta'minoti cheklovi: H100 SXM 700 vatt, 8 ta GPU'li DGX H100 esa 10 kilovattgacha iste'mol qiladi. Chekka qurilmalarda esa batareya va issiqlik chegaralari apparat imkoniyatini belgilaydi.</a:t>
             </a:r>
           </a:p>
         </p:txBody>
@@ -7788,12 +8883,12 @@
         </p:nvSpPr>
         <p:spPr>
           <a:xfrm>
-            <a:off x="550000" y="2990000"/>
-            <a:ext cx="11100000" cy="1250000"/>
+            <a:off x="550000" y="3023260"/>
+            <a:ext cx="11100000" cy="1503480"/>
           </a:xfrm>
           <a:prstGeom prst="roundRect">
             <a:avLst>
-              <a:gd name="adj" fmla="val 18000"/>
+              <a:gd name="adj" fmla="val 8000"/>
             </a:avLst>
           </a:prstGeom>
           <a:solidFill>
@@ -7834,8 +8929,8 @@
         </p:nvSpPr>
         <p:spPr>
           <a:xfrm>
-            <a:off x="550000" y="2990000"/>
-            <a:ext cx="70000" cy="1250000"/>
+            <a:off x="550000" y="3023260"/>
+            <a:ext cx="70000" cy="1503480"/>
           </a:xfrm>
           <a:prstGeom prst="rect">
             <a:avLst/>
@@ -7878,8 +8973,8 @@
         </p:nvSpPr>
         <p:spPr>
           <a:xfrm>
-            <a:off x="800000" y="3385000"/>
-            <a:ext cx="460000" cy="460000"/>
+            <a:off x="780000" y="3565000"/>
+            <a:ext cx="420000" cy="420000"/>
           </a:xfrm>
           <a:prstGeom prst="ellipse">
             <a:avLst/>
@@ -7912,7 +9007,7 @@
           <a:p>
             <a:pPr algn="ctr"/>
             <a:r>
-              <a:rPr sz="1600" b="1">
+              <a:rPr sz="1400" b="1">
                 <a:solidFill>
                   <a:srgbClr val="FFFFFF"/>
                 </a:solidFill>
@@ -7931,8 +9026,8 @@
         </p:nvSpPr>
         <p:spPr>
           <a:xfrm>
-            <a:off x="1450000" y="2990000"/>
-            <a:ext cx="10050000" cy="1250000"/>
+            <a:off x="1380000" y="3063260"/>
+            <a:ext cx="10150000" cy="1423480"/>
           </a:xfrm>
           <a:prstGeom prst="rect">
             <a:avLst/>
@@ -7940,14 +9035,13 @@
           <a:noFill/>
         </p:spPr>
         <p:txBody>
-          <a:bodyPr wrap="square" anchor="ctr" lIns="50800" rIns="50800">
+          <a:bodyPr wrap="square" anchor="ctr">
             <a:spAutoFit/>
           </a:bodyPr>
           <a:lstStyle/>
           <a:p>
-            <a:pPr algn="l"/>
             <a:r>
-              <a:rPr sz="1600" b="0">
+              <a:rPr sz="1400" b="0">
                 <a:solidFill>
                   <a:srgbClr val="1B2430"/>
                 </a:solidFill>
@@ -7966,12 +9060,12 @@
         </p:nvSpPr>
         <p:spPr>
           <a:xfrm>
-            <a:off x="550000" y="4360000"/>
-            <a:ext cx="11100000" cy="1250000"/>
+            <a:off x="550000" y="4636740"/>
+            <a:ext cx="11100000" cy="1503480"/>
           </a:xfrm>
           <a:prstGeom prst="roundRect">
             <a:avLst>
-              <a:gd name="adj" fmla="val 18000"/>
+              <a:gd name="adj" fmla="val 8000"/>
             </a:avLst>
           </a:prstGeom>
           <a:solidFill>
@@ -8012,8 +9106,8 @@
         </p:nvSpPr>
         <p:spPr>
           <a:xfrm>
-            <a:off x="550000" y="4360000"/>
-            <a:ext cx="70000" cy="1250000"/>
+            <a:off x="550000" y="4636740"/>
+            <a:ext cx="70000" cy="1503480"/>
           </a:xfrm>
           <a:prstGeom prst="rect">
             <a:avLst/>
@@ -8056,8 +9150,8 @@
         </p:nvSpPr>
         <p:spPr>
           <a:xfrm>
-            <a:off x="800000" y="4755000"/>
-            <a:ext cx="460000" cy="460000"/>
+            <a:off x="780000" y="5178480"/>
+            <a:ext cx="420000" cy="420000"/>
           </a:xfrm>
           <a:prstGeom prst="ellipse">
             <a:avLst/>
@@ -8090,7 +9184,7 @@
           <a:p>
             <a:pPr algn="ctr"/>
             <a:r>
-              <a:rPr sz="1600" b="1">
+              <a:rPr sz="1400" b="1">
                 <a:solidFill>
                   <a:srgbClr val="FFFFFF"/>
                 </a:solidFill>
@@ -8109,8 +9203,8 @@
         </p:nvSpPr>
         <p:spPr>
           <a:xfrm>
-            <a:off x="1450000" y="4360000"/>
-            <a:ext cx="10050000" cy="1250000"/>
+            <a:off x="1380000" y="4676740"/>
+            <a:ext cx="10150000" cy="1423480"/>
           </a:xfrm>
           <a:prstGeom prst="rect">
             <a:avLst/>
@@ -8118,20 +9212,35 @@
           <a:noFill/>
         </p:spPr>
         <p:txBody>
-          <a:bodyPr wrap="square" anchor="ctr" lIns="50800" rIns="50800">
+          <a:bodyPr wrap="square" anchor="ctr">
             <a:spAutoFit/>
           </a:bodyPr>
           <a:lstStyle/>
           <a:p>
-            <a:pPr algn="l"/>
             <a:r>
-              <a:rPr sz="1600" b="0">
+              <a:rPr sz="1500" b="1">
                 <a:solidFill>
-                  <a:srgbClr val="1B2430"/>
+                  <a:srgbClr val="1F3A5F"/>
                 </a:solidFill>
                 <a:latin typeface="Calibri"/>
               </a:rPr>
-              <a:t>Energiya va unumdorlik o'rtasida nochiziqli bog'liqlik bor. Dinamik quvvat chastota va kuchlanish kvadratiga proporsional (P ∝ f · V²), shuning uchun GPU chastotasini 10–15 foiz pasaytirish (nvidia-smi -pl bilan quvvat chegarasi yoki -lgc bilan chastota…</a:t>
+              <a:t>Energiya va unumdorlik o'rtasida nochiziqli bog'liqlik bor.</a:t>
+            </a:r>
+          </a:p>
+          <a:p>
+            <a:pPr>
+              <a:spcBef>
+                <a:spcPts val="400"/>
+              </a:spcBef>
+            </a:pPr>
+            <a:r>
+              <a:rPr sz="1400">
+                <a:solidFill>
+                  <a:srgbClr val="334055"/>
+                </a:solidFill>
+                <a:latin typeface="Calibri"/>
+              </a:rPr>
+              <a:t>Dinamik quvvat chastota va kuchlanish kvadratiga proporsional (P ∝ f · V²), shuning uchun GPU chastotasini 10–15 foiz pasaytirish (nvidia-smi -pl bilan quvvat chegarasi yoki -lgc bilan chastota qulfi) unumdorlikni 5–8 foiz, quvvatni 20–30 foiz kamaytirishi mumkin — memory-bound ish yuklarida unumdorlik deyarli o'zgarmaydi, chunki to'siq xotirada.</a:t>
             </a:r>
           </a:p>
         </p:txBody>
@@ -9328,7 +10437,7 @@
 </p:sld>
 </file>
 
-<file path=ppt/slides/slide13.xml><?xml version="1.0" encoding="utf-8"?>
+<file path=ppt/slides/slide14.xml><?xml version="1.0" encoding="utf-8"?>
 <p:sld xmlns:a="http://schemas.openxmlformats.org/drawingml/2006/main" xmlns:p="http://schemas.openxmlformats.org/presentationml/2006/main" xmlns:r="http://schemas.openxmlformats.org/officeDocument/2006/relationships">
   <p:cSld>
     <p:spTree>
@@ -10240,7 +11349,7 @@
 </p:sld>
 </file>
 
-<file path=ppt/slides/slide14.xml><?xml version="1.0" encoding="utf-8"?>
+<file path=ppt/slides/slide15.xml><?xml version="1.0" encoding="utf-8"?>
 <p:sld xmlns:a="http://schemas.openxmlformats.org/drawingml/2006/main" xmlns:p="http://schemas.openxmlformats.org/presentationml/2006/main" xmlns:r="http://schemas.openxmlformats.org/officeDocument/2006/relationships">
   <p:cSld>
     <p:spTree>
@@ -10569,7 +11678,7 @@
                 </a:solidFill>
                 <a:latin typeface="Calibri"/>
               </a:rPr>
-              <a:t>14</a:t>
+              <a:t>15</a:t>
             </a:r>
           </a:p>
         </p:txBody>
@@ -10582,12 +11691,12 @@
         </p:nvSpPr>
         <p:spPr>
           <a:xfrm>
-            <a:off x="550000" y="2076666"/>
-            <a:ext cx="11100000" cy="1250000"/>
+            <a:off x="550000" y="1965060"/>
+            <a:ext cx="11100000" cy="1754940"/>
           </a:xfrm>
           <a:prstGeom prst="roundRect">
             <a:avLst>
-              <a:gd name="adj" fmla="val 18000"/>
+              <a:gd name="adj" fmla="val 8000"/>
             </a:avLst>
           </a:prstGeom>
           <a:solidFill>
@@ -10628,8 +11737,8 @@
         </p:nvSpPr>
         <p:spPr>
           <a:xfrm>
-            <a:off x="550000" y="2076666"/>
-            <a:ext cx="70000" cy="1250000"/>
+            <a:off x="550000" y="1965060"/>
+            <a:ext cx="70000" cy="1754940"/>
           </a:xfrm>
           <a:prstGeom prst="rect">
             <a:avLst/>
@@ -10672,8 +11781,8 @@
         </p:nvSpPr>
         <p:spPr>
           <a:xfrm>
-            <a:off x="800000" y="2471666"/>
-            <a:ext cx="460000" cy="460000"/>
+            <a:off x="780000" y="2632530"/>
+            <a:ext cx="420000" cy="420000"/>
           </a:xfrm>
           <a:prstGeom prst="ellipse">
             <a:avLst/>
@@ -10706,7 +11815,7 @@
           <a:p>
             <a:pPr algn="ctr"/>
             <a:r>
-              <a:rPr sz="1600" b="1">
+              <a:rPr sz="1400" b="1">
                 <a:solidFill>
                   <a:srgbClr val="FFFFFF"/>
                 </a:solidFill>
@@ -10725,8 +11834,8 @@
         </p:nvSpPr>
         <p:spPr>
           <a:xfrm>
-            <a:off x="1450000" y="2076666"/>
-            <a:ext cx="10050000" cy="1250000"/>
+            <a:off x="1380000" y="2005060"/>
+            <a:ext cx="10150000" cy="1674940"/>
           </a:xfrm>
           <a:prstGeom prst="rect">
             <a:avLst/>
@@ -10734,20 +11843,35 @@
           <a:noFill/>
         </p:spPr>
         <p:txBody>
-          <a:bodyPr wrap="square" anchor="ctr" lIns="50800" rIns="50800">
+          <a:bodyPr wrap="square" anchor="ctr">
             <a:spAutoFit/>
           </a:bodyPr>
           <a:lstStyle/>
           <a:p>
-            <a:pPr algn="l"/>
             <a:r>
-              <a:rPr sz="1600" b="0">
+              <a:rPr sz="1800" b="1">
                 <a:solidFill>
-                  <a:srgbClr val="1B2430"/>
+                  <a:srgbClr val="1F3A5F"/>
                 </a:solidFill>
                 <a:latin typeface="Calibri"/>
               </a:rPr>
-              <a:t>Unumdorlik tahlilining yakuniy maqsadi — to'g'ri optimallashtirishni tanlash. Strategiya to'siq turiga bog'liq.</a:t>
+              <a:t>Unumdorlik tahlilining yakuniy maqsadi — to'g'ri optimallashtirishni tanlash.</a:t>
+            </a:r>
+          </a:p>
+          <a:p>
+            <a:pPr>
+              <a:spcBef>
+                <a:spcPts val="400"/>
+              </a:spcBef>
+            </a:pPr>
+            <a:r>
+              <a:rPr sz="1700">
+                <a:solidFill>
+                  <a:srgbClr val="334055"/>
+                </a:solidFill>
+                <a:latin typeface="Calibri"/>
+              </a:rPr>
+              <a:t>Strategiya to'siq turiga bog'liq.</a:t>
             </a:r>
           </a:p>
         </p:txBody>
@@ -10760,12 +11884,12 @@
         </p:nvSpPr>
         <p:spPr>
           <a:xfrm>
-            <a:off x="550000" y="3446666"/>
-            <a:ext cx="11100000" cy="1250000"/>
+            <a:off x="550000" y="3830000"/>
+            <a:ext cx="11100000" cy="1754940"/>
           </a:xfrm>
           <a:prstGeom prst="roundRect">
             <a:avLst>
-              <a:gd name="adj" fmla="val 18000"/>
+              <a:gd name="adj" fmla="val 8000"/>
             </a:avLst>
           </a:prstGeom>
           <a:solidFill>
@@ -10806,8 +11930,8 @@
         </p:nvSpPr>
         <p:spPr>
           <a:xfrm>
-            <a:off x="550000" y="3446666"/>
-            <a:ext cx="70000" cy="1250000"/>
+            <a:off x="550000" y="3830000"/>
+            <a:ext cx="70000" cy="1754940"/>
           </a:xfrm>
           <a:prstGeom prst="rect">
             <a:avLst/>
@@ -10850,8 +11974,8 @@
         </p:nvSpPr>
         <p:spPr>
           <a:xfrm>
-            <a:off x="800000" y="3841666"/>
-            <a:ext cx="460000" cy="460000"/>
+            <a:off x="780000" y="4497470"/>
+            <a:ext cx="420000" cy="420000"/>
           </a:xfrm>
           <a:prstGeom prst="ellipse">
             <a:avLst/>
@@ -10884,7 +12008,7 @@
           <a:p>
             <a:pPr algn="ctr"/>
             <a:r>
-              <a:rPr sz="1600" b="1">
+              <a:rPr sz="1400" b="1">
                 <a:solidFill>
                   <a:srgbClr val="FFFFFF"/>
                 </a:solidFill>
@@ -10903,8 +12027,8 @@
         </p:nvSpPr>
         <p:spPr>
           <a:xfrm>
-            <a:off x="1450000" y="3446666"/>
-            <a:ext cx="10050000" cy="1250000"/>
+            <a:off x="1380000" y="3870000"/>
+            <a:ext cx="10150000" cy="1674940"/>
           </a:xfrm>
           <a:prstGeom prst="rect">
             <a:avLst/>
@@ -10912,20 +12036,35 @@
           <a:noFill/>
         </p:spPr>
         <p:txBody>
-          <a:bodyPr wrap="square" anchor="ctr" lIns="50800" rIns="50800">
+          <a:bodyPr wrap="square" anchor="ctr">
             <a:spAutoFit/>
           </a:bodyPr>
           <a:lstStyle/>
           <a:p>
-            <a:pPr algn="l"/>
             <a:r>
-              <a:rPr sz="1600" b="0">
+              <a:rPr sz="1800" b="1">
                 <a:solidFill>
-                  <a:srgbClr val="1B2430"/>
+                  <a:srgbClr val="1F3A5F"/>
                 </a:solidFill>
                 <a:latin typeface="Calibri"/>
               </a:rPr>
               <a:t>Masshtablanuvchanlik to'sig'i uchun strategiya boshqacha: aloqa va hisoblashni ustma-ust qo'yish (gradient bucketing, asinxron all-reduce), aloqa hajmini kamaytirish (gradient siqish, FP16 aloqa), topologiyaga mos kollektivlar (NVLink ichida tensor…</a:t>
+            </a:r>
+          </a:p>
+          <a:p>
+            <a:pPr>
+              <a:spcBef>
+                <a:spcPts val="400"/>
+              </a:spcBef>
+            </a:pPr>
+            <a:r>
+              <a:rPr sz="1700">
+                <a:solidFill>
+                  <a:srgbClr val="334055"/>
+                </a:solidFill>
+                <a:latin typeface="Calibri"/>
+              </a:rPr>
+              <a:t>Energiya to'sig'i uchun: quvvat chegarasi, DVFS, kichik aniqlik, hisoblashni bulut va chekka o'rtasida qayta taqsimlash.</a:t>
             </a:r>
           </a:p>
         </p:txBody>
@@ -11758,7 +12897,7 @@
 </p:sld>
 </file>
 
-<file path=ppt/slides/slide15.xml><?xml version="1.0" encoding="utf-8"?>
+<file path=ppt/slides/slide16.xml><?xml version="1.0" encoding="utf-8"?>
 <p:sld xmlns:a="http://schemas.openxmlformats.org/drawingml/2006/main" xmlns:p="http://schemas.openxmlformats.org/presentationml/2006/main" xmlns:r="http://schemas.openxmlformats.org/officeDocument/2006/relationships">
   <p:cSld>
     <p:spTree>
@@ -12684,8 +13823,8 @@
         </p:nvSpPr>
         <p:spPr>
           <a:xfrm>
-            <a:off x="550000" y="1300000"/>
-            <a:ext cx="11100000" cy="894000"/>
+            <a:off x="550000" y="2255000"/>
+            <a:ext cx="11100000" cy="520000"/>
           </a:xfrm>
           <a:prstGeom prst="roundRect">
             <a:avLst>
@@ -12730,8 +13869,8 @@
         </p:nvSpPr>
         <p:spPr>
           <a:xfrm>
-            <a:off x="550000" y="1300000"/>
-            <a:ext cx="70000" cy="894000"/>
+            <a:off x="550000" y="2255000"/>
+            <a:ext cx="70000" cy="520000"/>
           </a:xfrm>
           <a:prstGeom prst="rect">
             <a:avLst/>
@@ -12774,8 +13913,8 @@
         </p:nvSpPr>
         <p:spPr>
           <a:xfrm>
-            <a:off x="800000" y="1517000"/>
-            <a:ext cx="460000" cy="460000"/>
+            <a:off x="780000" y="2325000"/>
+            <a:ext cx="380000" cy="380000"/>
           </a:xfrm>
           <a:prstGeom prst="ellipse">
             <a:avLst/>
@@ -12808,7 +13947,7 @@
           <a:p>
             <a:pPr algn="ctr"/>
             <a:r>
-              <a:rPr sz="1600" b="1">
+              <a:rPr sz="1400" b="1">
                 <a:solidFill>
                   <a:srgbClr val="FFFFFF"/>
                 </a:solidFill>
@@ -12827,8 +13966,8 @@
         </p:nvSpPr>
         <p:spPr>
           <a:xfrm>
-            <a:off x="1450000" y="1300000"/>
-            <a:ext cx="10050000" cy="894000"/>
+            <a:off x="1380000" y="2295000"/>
+            <a:ext cx="10150000" cy="440000"/>
           </a:xfrm>
           <a:prstGeom prst="rect">
             <a:avLst/>
@@ -12836,14 +13975,13 @@
           <a:noFill/>
         </p:spPr>
         <p:txBody>
-          <a:bodyPr wrap="square" anchor="ctr" lIns="50800" rIns="50800">
+          <a:bodyPr wrap="square" anchor="ctr">
             <a:spAutoFit/>
           </a:bodyPr>
           <a:lstStyle/>
           <a:p>
-            <a:pPr algn="l"/>
             <a:r>
-              <a:rPr sz="1900" b="0">
+              <a:rPr sz="1600" b="0">
                 <a:solidFill>
                   <a:srgbClr val="1B2430"/>
                 </a:solidFill>
@@ -12862,8 +14000,8 @@
         </p:nvSpPr>
         <p:spPr>
           <a:xfrm>
-            <a:off x="550000" y="2314000"/>
-            <a:ext cx="11100000" cy="894000"/>
+            <a:off x="550000" y="2885000"/>
+            <a:ext cx="11100000" cy="520000"/>
           </a:xfrm>
           <a:prstGeom prst="roundRect">
             <a:avLst>
@@ -12908,8 +14046,8 @@
         </p:nvSpPr>
         <p:spPr>
           <a:xfrm>
-            <a:off x="550000" y="2314000"/>
-            <a:ext cx="70000" cy="894000"/>
+            <a:off x="550000" y="2885000"/>
+            <a:ext cx="70000" cy="520000"/>
           </a:xfrm>
           <a:prstGeom prst="rect">
             <a:avLst/>
@@ -12952,8 +14090,8 @@
         </p:nvSpPr>
         <p:spPr>
           <a:xfrm>
-            <a:off x="800000" y="2531000"/>
-            <a:ext cx="460000" cy="460000"/>
+            <a:off x="780000" y="2955000"/>
+            <a:ext cx="380000" cy="380000"/>
           </a:xfrm>
           <a:prstGeom prst="ellipse">
             <a:avLst/>
@@ -12986,7 +14124,7 @@
           <a:p>
             <a:pPr algn="ctr"/>
             <a:r>
-              <a:rPr sz="1600" b="1">
+              <a:rPr sz="1400" b="1">
                 <a:solidFill>
                   <a:srgbClr val="FFFFFF"/>
                 </a:solidFill>
@@ -13005,8 +14143,8 @@
         </p:nvSpPr>
         <p:spPr>
           <a:xfrm>
-            <a:off x="1450000" y="2314000"/>
-            <a:ext cx="10050000" cy="894000"/>
+            <a:off x="1380000" y="2925000"/>
+            <a:ext cx="10150000" cy="440000"/>
           </a:xfrm>
           <a:prstGeom prst="rect">
             <a:avLst/>
@@ -13014,14 +14152,13 @@
           <a:noFill/>
         </p:spPr>
         <p:txBody>
-          <a:bodyPr wrap="square" anchor="ctr" lIns="50800" rIns="50800">
+          <a:bodyPr wrap="square" anchor="ctr">
             <a:spAutoFit/>
           </a:bodyPr>
           <a:lstStyle/>
           <a:p>
-            <a:pPr algn="l"/>
             <a:r>
-              <a:rPr sz="1900" b="0">
+              <a:rPr sz="1600" b="0">
                 <a:solidFill>
                   <a:srgbClr val="1B2430"/>
                 </a:solidFill>
@@ -13040,8 +14177,8 @@
         </p:nvSpPr>
         <p:spPr>
           <a:xfrm>
-            <a:off x="550000" y="3328000"/>
-            <a:ext cx="11100000" cy="894000"/>
+            <a:off x="550000" y="3515000"/>
+            <a:ext cx="11100000" cy="520000"/>
           </a:xfrm>
           <a:prstGeom prst="roundRect">
             <a:avLst>
@@ -13086,8 +14223,8 @@
         </p:nvSpPr>
         <p:spPr>
           <a:xfrm>
-            <a:off x="550000" y="3328000"/>
-            <a:ext cx="70000" cy="894000"/>
+            <a:off x="550000" y="3515000"/>
+            <a:ext cx="70000" cy="520000"/>
           </a:xfrm>
           <a:prstGeom prst="rect">
             <a:avLst/>
@@ -13130,8 +14267,8 @@
         </p:nvSpPr>
         <p:spPr>
           <a:xfrm>
-            <a:off x="800000" y="3545000"/>
-            <a:ext cx="460000" cy="460000"/>
+            <a:off x="780000" y="3585000"/>
+            <a:ext cx="380000" cy="380000"/>
           </a:xfrm>
           <a:prstGeom prst="ellipse">
             <a:avLst/>
@@ -13164,7 +14301,7 @@
           <a:p>
             <a:pPr algn="ctr"/>
             <a:r>
-              <a:rPr sz="1600" b="1">
+              <a:rPr sz="1400" b="1">
                 <a:solidFill>
                   <a:srgbClr val="FFFFFF"/>
                 </a:solidFill>
@@ -13183,8 +14320,8 @@
         </p:nvSpPr>
         <p:spPr>
           <a:xfrm>
-            <a:off x="1450000" y="3328000"/>
-            <a:ext cx="10050000" cy="894000"/>
+            <a:off x="1380000" y="3555000"/>
+            <a:ext cx="10150000" cy="440000"/>
           </a:xfrm>
           <a:prstGeom prst="rect">
             <a:avLst/>
@@ -13192,14 +14329,13 @@
           <a:noFill/>
         </p:spPr>
         <p:txBody>
-          <a:bodyPr wrap="square" anchor="ctr" lIns="50800" rIns="50800">
+          <a:bodyPr wrap="square" anchor="ctr">
             <a:spAutoFit/>
           </a:bodyPr>
           <a:lstStyle/>
           <a:p>
-            <a:pPr algn="l"/>
             <a:r>
-              <a:rPr sz="1900" b="0">
+              <a:rPr sz="1600" b="0">
                 <a:solidFill>
                   <a:srgbClr val="1B2430"/>
                 </a:solidFill>
@@ -13218,8 +14354,8 @@
         </p:nvSpPr>
         <p:spPr>
           <a:xfrm>
-            <a:off x="550000" y="4342000"/>
-            <a:ext cx="11100000" cy="894000"/>
+            <a:off x="550000" y="4145000"/>
+            <a:ext cx="11100000" cy="520000"/>
           </a:xfrm>
           <a:prstGeom prst="roundRect">
             <a:avLst>
@@ -13264,8 +14400,8 @@
         </p:nvSpPr>
         <p:spPr>
           <a:xfrm>
-            <a:off x="550000" y="4342000"/>
-            <a:ext cx="70000" cy="894000"/>
+            <a:off x="550000" y="4145000"/>
+            <a:ext cx="70000" cy="520000"/>
           </a:xfrm>
           <a:prstGeom prst="rect">
             <a:avLst/>
@@ -13308,8 +14444,8 @@
         </p:nvSpPr>
         <p:spPr>
           <a:xfrm>
-            <a:off x="800000" y="4559000"/>
-            <a:ext cx="460000" cy="460000"/>
+            <a:off x="780000" y="4215000"/>
+            <a:ext cx="380000" cy="380000"/>
           </a:xfrm>
           <a:prstGeom prst="ellipse">
             <a:avLst/>
@@ -13342,7 +14478,7 @@
           <a:p>
             <a:pPr algn="ctr"/>
             <a:r>
-              <a:rPr sz="1600" b="1">
+              <a:rPr sz="1400" b="1">
                 <a:solidFill>
                   <a:srgbClr val="FFFFFF"/>
                 </a:solidFill>
@@ -13361,8 +14497,8 @@
         </p:nvSpPr>
         <p:spPr>
           <a:xfrm>
-            <a:off x="1450000" y="4342000"/>
-            <a:ext cx="10050000" cy="894000"/>
+            <a:off x="1380000" y="4185000"/>
+            <a:ext cx="10150000" cy="440000"/>
           </a:xfrm>
           <a:prstGeom prst="rect">
             <a:avLst/>
@@ -13370,14 +14506,13 @@
           <a:noFill/>
         </p:spPr>
         <p:txBody>
-          <a:bodyPr wrap="square" anchor="ctr" lIns="50800" rIns="50800">
+          <a:bodyPr wrap="square" anchor="ctr">
             <a:spAutoFit/>
           </a:bodyPr>
           <a:lstStyle/>
           <a:p>
-            <a:pPr algn="l"/>
             <a:r>
-              <a:rPr sz="1900" b="0">
+              <a:rPr sz="1600" b="0">
                 <a:solidFill>
                   <a:srgbClr val="1B2430"/>
                 </a:solidFill>
@@ -13396,8 +14531,8 @@
         </p:nvSpPr>
         <p:spPr>
           <a:xfrm>
-            <a:off x="550000" y="5356000"/>
-            <a:ext cx="11100000" cy="894000"/>
+            <a:off x="550000" y="4775000"/>
+            <a:ext cx="11100000" cy="520000"/>
           </a:xfrm>
           <a:prstGeom prst="roundRect">
             <a:avLst>
@@ -13442,8 +14577,8 @@
         </p:nvSpPr>
         <p:spPr>
           <a:xfrm>
-            <a:off x="550000" y="5356000"/>
-            <a:ext cx="70000" cy="894000"/>
+            <a:off x="550000" y="4775000"/>
+            <a:ext cx="70000" cy="520000"/>
           </a:xfrm>
           <a:prstGeom prst="rect">
             <a:avLst/>
@@ -13486,8 +14621,8 @@
         </p:nvSpPr>
         <p:spPr>
           <a:xfrm>
-            <a:off x="800000" y="5573000"/>
-            <a:ext cx="460000" cy="460000"/>
+            <a:off x="780000" y="4845000"/>
+            <a:ext cx="380000" cy="380000"/>
           </a:xfrm>
           <a:prstGeom prst="ellipse">
             <a:avLst/>
@@ -13520,7 +14655,7 @@
           <a:p>
             <a:pPr algn="ctr"/>
             <a:r>
-              <a:rPr sz="1600" b="1">
+              <a:rPr sz="1400" b="1">
                 <a:solidFill>
                   <a:srgbClr val="FFFFFF"/>
                 </a:solidFill>
@@ -13539,8 +14674,8 @@
         </p:nvSpPr>
         <p:spPr>
           <a:xfrm>
-            <a:off x="1450000" y="5356000"/>
-            <a:ext cx="10050000" cy="894000"/>
+            <a:off x="1380000" y="4815000"/>
+            <a:ext cx="10150000" cy="440000"/>
           </a:xfrm>
           <a:prstGeom prst="rect">
             <a:avLst/>
@@ -13548,14 +14683,13 @@
           <a:noFill/>
         </p:spPr>
         <p:txBody>
-          <a:bodyPr wrap="square" anchor="ctr" lIns="50800" rIns="50800">
+          <a:bodyPr wrap="square" anchor="ctr">
             <a:spAutoFit/>
           </a:bodyPr>
           <a:lstStyle/>
           <a:p>
-            <a:pPr algn="l"/>
             <a:r>
-              <a:rPr sz="1900" b="0">
+              <a:rPr sz="1600" b="0">
                 <a:solidFill>
                   <a:srgbClr val="1B2430"/>
                 </a:solidFill>
@@ -16740,12 +17874,12 @@
         </p:nvSpPr>
         <p:spPr>
           <a:xfrm>
-            <a:off x="550000" y="1620000"/>
-            <a:ext cx="11100000" cy="1250000"/>
+            <a:off x="550000" y="1409780"/>
+            <a:ext cx="11100000" cy="1503480"/>
           </a:xfrm>
           <a:prstGeom prst="roundRect">
             <a:avLst>
-              <a:gd name="adj" fmla="val 18000"/>
+              <a:gd name="adj" fmla="val 8000"/>
             </a:avLst>
           </a:prstGeom>
           <a:solidFill>
@@ -16786,8 +17920,8 @@
         </p:nvSpPr>
         <p:spPr>
           <a:xfrm>
-            <a:off x="550000" y="1620000"/>
-            <a:ext cx="70000" cy="1250000"/>
+            <a:off x="550000" y="1409780"/>
+            <a:ext cx="70000" cy="1503480"/>
           </a:xfrm>
           <a:prstGeom prst="rect">
             <a:avLst/>
@@ -16830,8 +17964,8 @@
         </p:nvSpPr>
         <p:spPr>
           <a:xfrm>
-            <a:off x="800000" y="2015000"/>
-            <a:ext cx="460000" cy="460000"/>
+            <a:off x="780000" y="1951520"/>
+            <a:ext cx="420000" cy="420000"/>
           </a:xfrm>
           <a:prstGeom prst="ellipse">
             <a:avLst/>
@@ -16864,7 +17998,7 @@
           <a:p>
             <a:pPr algn="ctr"/>
             <a:r>
-              <a:rPr sz="1600" b="1">
+              <a:rPr sz="1400" b="1">
                 <a:solidFill>
                   <a:srgbClr val="FFFFFF"/>
                 </a:solidFill>
@@ -16883,8 +18017,8 @@
         </p:nvSpPr>
         <p:spPr>
           <a:xfrm>
-            <a:off x="1450000" y="1620000"/>
-            <a:ext cx="10050000" cy="1250000"/>
+            <a:off x="1380000" y="1449780"/>
+            <a:ext cx="10150000" cy="1423480"/>
           </a:xfrm>
           <a:prstGeom prst="rect">
             <a:avLst/>
@@ -16892,20 +18026,35 @@
           <a:noFill/>
         </p:spPr>
         <p:txBody>
-          <a:bodyPr wrap="square" anchor="ctr" lIns="50800" rIns="50800">
+          <a:bodyPr wrap="square" anchor="ctr">
             <a:spAutoFit/>
           </a:bodyPr>
           <a:lstStyle/>
           <a:p>
-            <a:pPr algn="l"/>
             <a:r>
-              <a:rPr sz="1600" b="0">
+              <a:rPr sz="1500" b="1">
                 <a:solidFill>
-                  <a:srgbClr val="1B2430"/>
+                  <a:srgbClr val="1F3A5F"/>
                 </a:solidFill>
                 <a:latin typeface="Calibri"/>
               </a:rPr>
-              <a:t>Kechikish (latency) — bitta so'rovni boshidan oxirigacha bajarish vaqti. AI tizimida u bir necha komponentdan yig'iladi: tarmoq va navbatda kutish, oldindan qayta ishlash (preprocessing), xost-qurilma ma'lumot ko'chirish, modelning o'zi, keyingi qayta ishlash.</a:t>
+              <a:t>Kechikish (latency) — bitta so'rovni boshidan oxirigacha bajarish vaqti.</a:t>
+            </a:r>
+          </a:p>
+          <a:p>
+            <a:pPr>
+              <a:spcBef>
+                <a:spcPts val="400"/>
+              </a:spcBef>
+            </a:pPr>
+            <a:r>
+              <a:rPr sz="1400">
+                <a:solidFill>
+                  <a:srgbClr val="334055"/>
+                </a:solidFill>
+                <a:latin typeface="Calibri"/>
+              </a:rPr>
+              <a:t>AI tizimida u bir necha komponentdan yig'iladi: tarmoq va navbatda kutish, oldindan qayta ishlash (preprocessing), xost-qurilma ma'lumot ko'chirish, modelning o'zi, keyingi qayta ishlash. Kechikish hech qachon bitta son emas — u taqsimot. Shuning uchun o'rtacha qiymat bilan birga foizillar (percentiles) hisobot qilinadi: p50 (mediana), p95, p99.</a:t>
             </a:r>
           </a:p>
         </p:txBody>
@@ -16918,12 +18067,12 @@
         </p:nvSpPr>
         <p:spPr>
           <a:xfrm>
-            <a:off x="550000" y="2990000"/>
-            <a:ext cx="11100000" cy="1250000"/>
+            <a:off x="550000" y="3023260"/>
+            <a:ext cx="11100000" cy="1503480"/>
           </a:xfrm>
           <a:prstGeom prst="roundRect">
             <a:avLst>
-              <a:gd name="adj" fmla="val 18000"/>
+              <a:gd name="adj" fmla="val 8000"/>
             </a:avLst>
           </a:prstGeom>
           <a:solidFill>
@@ -16964,8 +18113,8 @@
         </p:nvSpPr>
         <p:spPr>
           <a:xfrm>
-            <a:off x="550000" y="2990000"/>
-            <a:ext cx="70000" cy="1250000"/>
+            <a:off x="550000" y="3023260"/>
+            <a:ext cx="70000" cy="1503480"/>
           </a:xfrm>
           <a:prstGeom prst="rect">
             <a:avLst/>
@@ -17008,8 +18157,8 @@
         </p:nvSpPr>
         <p:spPr>
           <a:xfrm>
-            <a:off x="800000" y="3385000"/>
-            <a:ext cx="460000" cy="460000"/>
+            <a:off x="780000" y="3565000"/>
+            <a:ext cx="420000" cy="420000"/>
           </a:xfrm>
           <a:prstGeom prst="ellipse">
             <a:avLst/>
@@ -17042,7 +18191,7 @@
           <a:p>
             <a:pPr algn="ctr"/>
             <a:r>
-              <a:rPr sz="1600" b="1">
+              <a:rPr sz="1400" b="1">
                 <a:solidFill>
                   <a:srgbClr val="FFFFFF"/>
                 </a:solidFill>
@@ -17061,8 +18210,8 @@
         </p:nvSpPr>
         <p:spPr>
           <a:xfrm>
-            <a:off x="1450000" y="2990000"/>
-            <a:ext cx="10050000" cy="1250000"/>
+            <a:off x="1380000" y="3063260"/>
+            <a:ext cx="10150000" cy="1423480"/>
           </a:xfrm>
           <a:prstGeom prst="rect">
             <a:avLst/>
@@ -17070,20 +18219,35 @@
           <a:noFill/>
         </p:spPr>
         <p:txBody>
-          <a:bodyPr wrap="square" anchor="ctr" lIns="50800" rIns="50800">
+          <a:bodyPr wrap="square" anchor="ctr">
             <a:spAutoFit/>
           </a:bodyPr>
           <a:lstStyle/>
           <a:p>
-            <a:pPr algn="l"/>
             <a:r>
-              <a:rPr sz="1600" b="0">
+              <a:rPr sz="1500" b="1">
                 <a:solidFill>
-                  <a:srgbClr val="1B2430"/>
+                  <a:srgbClr val="1F3A5F"/>
                 </a:solidFill>
                 <a:latin typeface="Calibri"/>
               </a:rPr>
-              <a:t>O'tkazuvchanlik (throughput) — vaqt birligida bajarilgan ish miqdori: sekundiga tasvirlar, so'rovlar yoki tokenlar. Latency va throughput o'rtasidagi munosabat Little qonuni bilan ifodalanadi: L = λ · W, bu yerda L — tizimdagi o'rtacha so'rovlar soni…</a:t>
+              <a:t>O'tkazuvchanlik (throughput) — vaqt birligida bajarilgan ish miqdori: sekundiga tasvirlar, so'rovlar yoki tokenlar.</a:t>
+            </a:r>
+          </a:p>
+          <a:p>
+            <a:pPr>
+              <a:spcBef>
+                <a:spcPts val="400"/>
+              </a:spcBef>
+            </a:pPr>
+            <a:r>
+              <a:rPr sz="1400">
+                <a:solidFill>
+                  <a:srgbClr val="334055"/>
+                </a:solidFill>
+                <a:latin typeface="Calibri"/>
+              </a:rPr>
+              <a:t>Latency va throughput o'rtasidagi munosabat Little qonuni bilan ifodalanadi: L = λ · W, bu yerda L — tizimdagi o'rtacha so'rovlar soni (parallellik), λ — o'tkazuvchanlik, W — o'rtacha kechikish.</a:t>
             </a:r>
           </a:p>
         </p:txBody>
@@ -17096,12 +18260,12 @@
         </p:nvSpPr>
         <p:spPr>
           <a:xfrm>
-            <a:off x="550000" y="4360000"/>
-            <a:ext cx="11100000" cy="1250000"/>
+            <a:off x="550000" y="4636740"/>
+            <a:ext cx="11100000" cy="1503480"/>
           </a:xfrm>
           <a:prstGeom prst="roundRect">
             <a:avLst>
-              <a:gd name="adj" fmla="val 18000"/>
+              <a:gd name="adj" fmla="val 8000"/>
             </a:avLst>
           </a:prstGeom>
           <a:solidFill>
@@ -17142,8 +18306,8 @@
         </p:nvSpPr>
         <p:spPr>
           <a:xfrm>
-            <a:off x="550000" y="4360000"/>
-            <a:ext cx="70000" cy="1250000"/>
+            <a:off x="550000" y="4636740"/>
+            <a:ext cx="70000" cy="1503480"/>
           </a:xfrm>
           <a:prstGeom prst="rect">
             <a:avLst/>
@@ -17186,8 +18350,8 @@
         </p:nvSpPr>
         <p:spPr>
           <a:xfrm>
-            <a:off x="800000" y="4755000"/>
-            <a:ext cx="460000" cy="460000"/>
+            <a:off x="780000" y="5178480"/>
+            <a:ext cx="420000" cy="420000"/>
           </a:xfrm>
           <a:prstGeom prst="ellipse">
             <a:avLst/>
@@ -17220,7 +18384,7 @@
           <a:p>
             <a:pPr algn="ctr"/>
             <a:r>
-              <a:rPr sz="1600" b="1">
+              <a:rPr sz="1400" b="1">
                 <a:solidFill>
                   <a:srgbClr val="FFFFFF"/>
                 </a:solidFill>
@@ -17239,8 +18403,8 @@
         </p:nvSpPr>
         <p:spPr>
           <a:xfrm>
-            <a:off x="1450000" y="4360000"/>
-            <a:ext cx="10050000" cy="1250000"/>
+            <a:off x="1380000" y="4676740"/>
+            <a:ext cx="10150000" cy="1423480"/>
           </a:xfrm>
           <a:prstGeom prst="rect">
             <a:avLst/>
@@ -17248,20 +18412,35 @@
           <a:noFill/>
         </p:spPr>
         <p:txBody>
-          <a:bodyPr wrap="square" anchor="ctr" lIns="50800" rIns="50800">
+          <a:bodyPr wrap="square" anchor="ctr">
             <a:spAutoFit/>
           </a:bodyPr>
           <a:lstStyle/>
           <a:p>
-            <a:pPr algn="l"/>
             <a:r>
-              <a:rPr sz="1600" b="0">
+              <a:rPr sz="1500" b="1">
                 <a:solidFill>
-                  <a:srgbClr val="1B2430"/>
+                  <a:srgbClr val="1F3A5F"/>
                 </a:solidFill>
                 <a:latin typeface="Calibri"/>
               </a:rPr>
-              <a:t>Masshtablanuvchanlik (scalability) — resurs qo'shilganda unumdorlikning qanday o'sishi. Ikki tur farqlanadi: kuchli masshtablash (strong scaling) — muammo hajmi o'zgarmay, protsessorlar soni ortadi; zaif masshtablash (weak scaling) — har protsessorga to'g'ri…</a:t>
+              <a:t>Masshtablanuvchanlik (scalability) — resurs qo'shilganda unumdorlikning qanday o'sishi.</a:t>
+            </a:r>
+          </a:p>
+          <a:p>
+            <a:pPr>
+              <a:spcBef>
+                <a:spcPts val="400"/>
+              </a:spcBef>
+            </a:pPr>
+            <a:r>
+              <a:rPr sz="1400">
+                <a:solidFill>
+                  <a:srgbClr val="334055"/>
+                </a:solidFill>
+                <a:latin typeface="Calibri"/>
+              </a:rPr>
+              <a:t>Ikki tur farqlanadi: kuchli masshtablash (strong scaling) — muammo hajmi o'zgarmay, protsessorlar soni ortadi; zaif masshtablash (weak scaling) — har protsessorga to'g'ri keladigan ish hajmi o'zgarmay, umumiy muammo ortadi.</a:t>
             </a:r>
           </a:p>
         </p:txBody>
@@ -20758,12 +21937,12 @@
         </p:nvSpPr>
         <p:spPr>
           <a:xfrm>
-            <a:off x="550000" y="1620000"/>
-            <a:ext cx="11100000" cy="1250000"/>
+            <a:off x="550000" y="1409780"/>
+            <a:ext cx="11100000" cy="1503480"/>
           </a:xfrm>
           <a:prstGeom prst="roundRect">
             <a:avLst>
-              <a:gd name="adj" fmla="val 18000"/>
+              <a:gd name="adj" fmla="val 8000"/>
             </a:avLst>
           </a:prstGeom>
           <a:solidFill>
@@ -20804,8 +21983,8 @@
         </p:nvSpPr>
         <p:spPr>
           <a:xfrm>
-            <a:off x="550000" y="1620000"/>
-            <a:ext cx="70000" cy="1250000"/>
+            <a:off x="550000" y="1409780"/>
+            <a:ext cx="70000" cy="1503480"/>
           </a:xfrm>
           <a:prstGeom prst="rect">
             <a:avLst/>
@@ -20848,8 +22027,8 @@
         </p:nvSpPr>
         <p:spPr>
           <a:xfrm>
-            <a:off x="800000" y="2015000"/>
-            <a:ext cx="460000" cy="460000"/>
+            <a:off x="780000" y="1951520"/>
+            <a:ext cx="420000" cy="420000"/>
           </a:xfrm>
           <a:prstGeom prst="ellipse">
             <a:avLst/>
@@ -20882,7 +22061,7 @@
           <a:p>
             <a:pPr algn="ctr"/>
             <a:r>
-              <a:rPr sz="1600" b="1">
+              <a:rPr sz="1400" b="1">
                 <a:solidFill>
                   <a:srgbClr val="FFFFFF"/>
                 </a:solidFill>
@@ -20901,8 +22080,8 @@
         </p:nvSpPr>
         <p:spPr>
           <a:xfrm>
-            <a:off x="1450000" y="1620000"/>
-            <a:ext cx="10050000" cy="1250000"/>
+            <a:off x="1380000" y="1449780"/>
+            <a:ext cx="10150000" cy="1423480"/>
           </a:xfrm>
           <a:prstGeom prst="rect">
             <a:avLst/>
@@ -20910,20 +22089,35 @@
           <a:noFill/>
         </p:spPr>
         <p:txBody>
-          <a:bodyPr wrap="square" anchor="ctr" lIns="50800" rIns="50800">
+          <a:bodyPr wrap="square" anchor="ctr">
             <a:spAutoFit/>
           </a:bodyPr>
           <a:lstStyle/>
           <a:p>
-            <a:pPr algn="l"/>
             <a:r>
-              <a:rPr sz="1600" b="0">
+              <a:rPr sz="1500" b="1">
                 <a:solidFill>
-                  <a:srgbClr val="1B2430"/>
+                  <a:srgbClr val="1F3A5F"/>
                 </a:solidFill>
                 <a:latin typeface="Calibri"/>
               </a:rPr>
-              <a:t>Benchmarking — standart ish yukini nazorat qilingan sharoitda o'lchash; profiling — bajarilish davomida vaqt va resurslarning qayerga sarflanganini tahlil qilish. Ikkalasi ham metodologiyaga bog'liq.</a:t>
+              <a:t>Benchmarking — standart ish yukini nazorat qilingan sharoitda o'lchash; profiling — bajarilish davomida vaqt va resurslarning qayerga sarflanganini tahlil qilish.</a:t>
+            </a:r>
+          </a:p>
+          <a:p>
+            <a:pPr>
+              <a:spcBef>
+                <a:spcPts val="400"/>
+              </a:spcBef>
+            </a:pPr>
+            <a:r>
+              <a:rPr sz="1400">
+                <a:solidFill>
+                  <a:srgbClr val="334055"/>
+                </a:solidFill>
+                <a:latin typeface="Calibri"/>
+              </a:rPr>
+              <a:t>Ikkalasi ham metodologiyaga bog'liq.</a:t>
             </a:r>
           </a:p>
         </p:txBody>
@@ -20936,12 +22130,12 @@
         </p:nvSpPr>
         <p:spPr>
           <a:xfrm>
-            <a:off x="550000" y="2990000"/>
-            <a:ext cx="11100000" cy="1250000"/>
+            <a:off x="550000" y="3023260"/>
+            <a:ext cx="11100000" cy="1503480"/>
           </a:xfrm>
           <a:prstGeom prst="roundRect">
             <a:avLst>
-              <a:gd name="adj" fmla="val 18000"/>
+              <a:gd name="adj" fmla="val 8000"/>
             </a:avLst>
           </a:prstGeom>
           <a:solidFill>
@@ -20982,8 +22176,8 @@
         </p:nvSpPr>
         <p:spPr>
           <a:xfrm>
-            <a:off x="550000" y="2990000"/>
-            <a:ext cx="70000" cy="1250000"/>
+            <a:off x="550000" y="3023260"/>
+            <a:ext cx="70000" cy="1503480"/>
           </a:xfrm>
           <a:prstGeom prst="rect">
             <a:avLst/>
@@ -21026,8 +22220,8 @@
         </p:nvSpPr>
         <p:spPr>
           <a:xfrm>
-            <a:off x="800000" y="3385000"/>
-            <a:ext cx="460000" cy="460000"/>
+            <a:off x="780000" y="3565000"/>
+            <a:ext cx="420000" cy="420000"/>
           </a:xfrm>
           <a:prstGeom prst="ellipse">
             <a:avLst/>
@@ -21060,7 +22254,7 @@
           <a:p>
             <a:pPr algn="ctr"/>
             <a:r>
-              <a:rPr sz="1600" b="1">
+              <a:rPr sz="1400" b="1">
                 <a:solidFill>
                   <a:srgbClr val="FFFFFF"/>
                 </a:solidFill>
@@ -21079,8 +22273,8 @@
         </p:nvSpPr>
         <p:spPr>
           <a:xfrm>
-            <a:off x="1450000" y="2990000"/>
-            <a:ext cx="10050000" cy="1250000"/>
+            <a:off x="1380000" y="3063260"/>
+            <a:ext cx="10150000" cy="1423480"/>
           </a:xfrm>
           <a:prstGeom prst="rect">
             <a:avLst/>
@@ -21088,20 +22282,35 @@
           <a:noFill/>
         </p:spPr>
         <p:txBody>
-          <a:bodyPr wrap="square" anchor="ctr" lIns="50800" rIns="50800">
+          <a:bodyPr wrap="square" anchor="ctr">
             <a:spAutoFit/>
           </a:bodyPr>
           <a:lstStyle/>
           <a:p>
-            <a:pPr algn="l"/>
             <a:r>
-              <a:rPr sz="1600" b="0">
+              <a:rPr sz="1500" b="1">
                 <a:solidFill>
-                  <a:srgbClr val="1B2430"/>
+                  <a:srgbClr val="1F3A5F"/>
                 </a:solidFill>
                 <a:latin typeface="Calibri"/>
               </a:rPr>
-              <a:t>Sanoat standarti — MLCommons tashkilotining MLPerf benchmark to'plami. MLPerf Training LLM, tasvir tasniflash, obyekt aniqlash kabi vazifalar uchun belgilangan sifatga yetish vaqtini o'lchaydi; MLPerf Inference esa to'rt ssenariyda ishlaydi: bitta oqim…</a:t>
+              <a:t>Sanoat standarti — MLCommons tashkilotining MLPerf benchmark to'plami.</a:t>
+            </a:r>
+          </a:p>
+          <a:p>
+            <a:pPr>
+              <a:spcBef>
+                <a:spcPts val="400"/>
+              </a:spcBef>
+            </a:pPr>
+            <a:r>
+              <a:rPr sz="1400">
+                <a:solidFill>
+                  <a:srgbClr val="334055"/>
+                </a:solidFill>
+                <a:latin typeface="Calibri"/>
+              </a:rPr>
+              <a:t>MLPerf Training LLM, tasvir tasniflash, obyekt aniqlash kabi vazifalar uchun belgilangan sifatga yetish vaqtini o'lchaydi; MLPerf Inference esa to'rt ssenariyda ishlaydi: bitta oqim (single stream — kechikish), ko'p oqim (multi stream), server (Puasson taqsimotli so'rovlar, kechikish chegarasi bilan) va oflayn (maksimal throughput).</a:t>
             </a:r>
           </a:p>
         </p:txBody>
@@ -21114,12 +22323,12 @@
         </p:nvSpPr>
         <p:spPr>
           <a:xfrm>
-            <a:off x="550000" y="4360000"/>
-            <a:ext cx="11100000" cy="1250000"/>
+            <a:off x="550000" y="4636740"/>
+            <a:ext cx="11100000" cy="1503480"/>
           </a:xfrm>
           <a:prstGeom prst="roundRect">
             <a:avLst>
-              <a:gd name="adj" fmla="val 18000"/>
+              <a:gd name="adj" fmla="val 8000"/>
             </a:avLst>
           </a:prstGeom>
           <a:solidFill>
@@ -21160,8 +22369,8 @@
         </p:nvSpPr>
         <p:spPr>
           <a:xfrm>
-            <a:off x="550000" y="4360000"/>
-            <a:ext cx="70000" cy="1250000"/>
+            <a:off x="550000" y="4636740"/>
+            <a:ext cx="70000" cy="1503480"/>
           </a:xfrm>
           <a:prstGeom prst="rect">
             <a:avLst/>
@@ -21204,8 +22413,8 @@
         </p:nvSpPr>
         <p:spPr>
           <a:xfrm>
-            <a:off x="800000" y="4755000"/>
-            <a:ext cx="460000" cy="460000"/>
+            <a:off x="780000" y="5178480"/>
+            <a:ext cx="420000" cy="420000"/>
           </a:xfrm>
           <a:prstGeom prst="ellipse">
             <a:avLst/>
@@ -21238,7 +22447,7 @@
           <a:p>
             <a:pPr algn="ctr"/>
             <a:r>
-              <a:rPr sz="1600" b="1">
+              <a:rPr sz="1400" b="1">
                 <a:solidFill>
                   <a:srgbClr val="FFFFFF"/>
                 </a:solidFill>
@@ -21257,8 +22466,8 @@
         </p:nvSpPr>
         <p:spPr>
           <a:xfrm>
-            <a:off x="1450000" y="4360000"/>
-            <a:ext cx="10050000" cy="1250000"/>
+            <a:off x="1380000" y="4676740"/>
+            <a:ext cx="10150000" cy="1423480"/>
           </a:xfrm>
           <a:prstGeom prst="rect">
             <a:avLst/>
@@ -21266,20 +22475,35 @@
           <a:noFill/>
         </p:spPr>
         <p:txBody>
-          <a:bodyPr wrap="square" anchor="ctr" lIns="50800" rIns="50800">
+          <a:bodyPr wrap="square" anchor="ctr">
             <a:spAutoFit/>
           </a:bodyPr>
           <a:lstStyle/>
           <a:p>
-            <a:pPr algn="l"/>
             <a:r>
-              <a:rPr sz="1600" b="0">
+              <a:rPr sz="1500" b="1">
                 <a:solidFill>
-                  <a:srgbClr val="1B2430"/>
+                  <a:srgbClr val="1F3A5F"/>
                 </a:solidFill>
                 <a:latin typeface="Calibri"/>
               </a:rPr>
-              <a:t>Profiling vositalari bir necha darajada ishlaydi. PyTorch Profiler (torch.profiler) freymvork darajasida: har bir operator uchun CPU va CUDA vaqti, chaqiruvlar soni, xotira ajratish, hatto Python stekini yozadi va natijani TensorBoard yoki Chrome trace…</a:t>
+              <a:t>Profiling vositalari bir necha darajada ishlaydi.</a:t>
+            </a:r>
+          </a:p>
+          <a:p>
+            <a:pPr>
+              <a:spcBef>
+                <a:spcPts val="400"/>
+              </a:spcBef>
+            </a:pPr>
+            <a:r>
+              <a:rPr sz="1400">
+                <a:solidFill>
+                  <a:srgbClr val="334055"/>
+                </a:solidFill>
+                <a:latin typeface="Calibri"/>
+              </a:rPr>
+              <a:t>PyTorch Profiler (torch.profiler) freymvork darajasida: har bir operator uchun CPU va CUDA vaqti, chaqiruvlar soni, xotira ajratish, hatto Python stekini yozadi va natijani TensorBoard yoki Chrome trace ko'rinishida beradi.</a:t>
             </a:r>
           </a:p>
         </p:txBody>
@@ -23730,12 +24954,12 @@
         </p:nvSpPr>
         <p:spPr>
           <a:xfrm>
-            <a:off x="550000" y="1300000"/>
-            <a:ext cx="11100000" cy="1147500"/>
+            <a:off x="550000" y="1409780"/>
+            <a:ext cx="11100000" cy="1503480"/>
           </a:xfrm>
           <a:prstGeom prst="roundRect">
             <a:avLst>
-              <a:gd name="adj" fmla="val 18000"/>
+              <a:gd name="adj" fmla="val 8000"/>
             </a:avLst>
           </a:prstGeom>
           <a:solidFill>
@@ -23776,8 +25000,8 @@
         </p:nvSpPr>
         <p:spPr>
           <a:xfrm>
-            <a:off x="550000" y="1300000"/>
-            <a:ext cx="70000" cy="1147500"/>
+            <a:off x="550000" y="1409780"/>
+            <a:ext cx="70000" cy="1503480"/>
           </a:xfrm>
           <a:prstGeom prst="rect">
             <a:avLst/>
@@ -23820,8 +25044,8 @@
         </p:nvSpPr>
         <p:spPr>
           <a:xfrm>
-            <a:off x="800000" y="1643750"/>
-            <a:ext cx="460000" cy="460000"/>
+            <a:off x="780000" y="1951520"/>
+            <a:ext cx="420000" cy="420000"/>
           </a:xfrm>
           <a:prstGeom prst="ellipse">
             <a:avLst/>
@@ -23854,7 +25078,7 @@
           <a:p>
             <a:pPr algn="ctr"/>
             <a:r>
-              <a:rPr sz="1600" b="1">
+              <a:rPr sz="1400" b="1">
                 <a:solidFill>
                   <a:srgbClr val="FFFFFF"/>
                 </a:solidFill>
@@ -23873,8 +25097,8 @@
         </p:nvSpPr>
         <p:spPr>
           <a:xfrm>
-            <a:off x="1450000" y="1300000"/>
-            <a:ext cx="10050000" cy="1147500"/>
+            <a:off x="1380000" y="1449780"/>
+            <a:ext cx="10150000" cy="1423480"/>
           </a:xfrm>
           <a:prstGeom prst="rect">
             <a:avLst/>
@@ -23882,20 +25106,35 @@
           <a:noFill/>
         </p:spPr>
         <p:txBody>
-          <a:bodyPr wrap="square" anchor="ctr" lIns="50800" rIns="50800">
+          <a:bodyPr wrap="square" anchor="ctr">
             <a:spAutoFit/>
           </a:bodyPr>
           <a:lstStyle/>
           <a:p>
-            <a:pPr algn="l"/>
             <a:r>
-              <a:rPr sz="1400" b="0">
+              <a:rPr sz="1500" b="1">
                 <a:solidFill>
-                  <a:srgbClr val="1B2430"/>
+                  <a:srgbClr val="1F3A5F"/>
                 </a:solidFill>
                 <a:latin typeface="Calibri"/>
               </a:rPr>
-              <a:t>Roofline modeli (Williams, Waterman, Patterson, 2009) ish yukining erishishi mumkin bo'lgan unumdorligini ikki apparat parametri bilan bog'laydi: cho'qqi hisoblash tezligi P_peak (FLOP/s)…</a:t>
+              <a:t>Roofline modeli (Williams, Waterman, Patterson, 2009) ish yukining erishishi mumkin bo'lgan unumdorligini ikki apparat parametri bilan bog'laydi: cho'qqi hisoblash tezligi P_peak (FLOP/s) va cho'qqi xotira o'tkazuvchanligi B_peak (bayt/s).</a:t>
+            </a:r>
+          </a:p>
+          <a:p>
+            <a:pPr>
+              <a:spcBef>
+                <a:spcPts val="400"/>
+              </a:spcBef>
+            </a:pPr>
+            <a:r>
+              <a:rPr sz="1400">
+                <a:solidFill>
+                  <a:srgbClr val="334055"/>
+                </a:solidFill>
+                <a:latin typeface="Calibri"/>
+              </a:rPr>
+              <a:t>Ish yukining xususiyati — arifmetik intensivlik (arithmetic intensity) I = FLOP soni / xotiradan o'qilgan va yozilgan baytlar soni (FLOP/bayt).</a:t>
             </a:r>
           </a:p>
         </p:txBody>
@@ -23908,12 +25147,12 @@
         </p:nvSpPr>
         <p:spPr>
           <a:xfrm>
-            <a:off x="550000" y="2567500"/>
-            <a:ext cx="11100000" cy="1147500"/>
+            <a:off x="550000" y="3023260"/>
+            <a:ext cx="11100000" cy="1503480"/>
           </a:xfrm>
           <a:prstGeom prst="roundRect">
             <a:avLst>
-              <a:gd name="adj" fmla="val 18000"/>
+              <a:gd name="adj" fmla="val 8000"/>
             </a:avLst>
           </a:prstGeom>
           <a:solidFill>
@@ -23954,8 +25193,8 @@
         </p:nvSpPr>
         <p:spPr>
           <a:xfrm>
-            <a:off x="550000" y="2567500"/>
-            <a:ext cx="70000" cy="1147500"/>
+            <a:off x="550000" y="3023260"/>
+            <a:ext cx="70000" cy="1503480"/>
           </a:xfrm>
           <a:prstGeom prst="rect">
             <a:avLst/>
@@ -23998,8 +25237,8 @@
         </p:nvSpPr>
         <p:spPr>
           <a:xfrm>
-            <a:off x="800000" y="2911250"/>
-            <a:ext cx="460000" cy="460000"/>
+            <a:off x="780000" y="3565000"/>
+            <a:ext cx="420000" cy="420000"/>
           </a:xfrm>
           <a:prstGeom prst="ellipse">
             <a:avLst/>
@@ -24032,7 +25271,7 @@
           <a:p>
             <a:pPr algn="ctr"/>
             <a:r>
-              <a:rPr sz="1600" b="1">
+              <a:rPr sz="1400" b="1">
                 <a:solidFill>
                   <a:srgbClr val="FFFFFF"/>
                 </a:solidFill>
@@ -24051,8 +25290,8 @@
         </p:nvSpPr>
         <p:spPr>
           <a:xfrm>
-            <a:off x="1450000" y="2567500"/>
-            <a:ext cx="10050000" cy="1147500"/>
+            <a:off x="1380000" y="3063260"/>
+            <a:ext cx="10150000" cy="1423480"/>
           </a:xfrm>
           <a:prstGeom prst="rect">
             <a:avLst/>
@@ -24060,22 +25299,37 @@
           <a:noFill/>
         </p:spPr>
         <p:txBody>
-          <a:bodyPr wrap="square" anchor="ctr" lIns="50800" rIns="50800">
+          <a:bodyPr wrap="square" anchor="ctr">
             <a:spAutoFit/>
           </a:bodyPr>
           <a:lstStyle/>
           <a:p>
-            <a:pPr algn="l"/>
             <a:r>
-              <a:rPr sz="1400" b="0">
+              <a:rPr sz="1500" b="1">
                 <a:solidFill>
-                  <a:srgbClr val="1B2430"/>
+                  <a:srgbClr val="1F3A5F"/>
                 </a:solidFill>
                 <a:latin typeface="Calibri"/>
               </a:rPr>
               <a:t>Zamonaviy tezlatkichlar uchun tizma nuqtasi hisoblab chiqamiz.</a:t>
             </a:r>
           </a:p>
+          <a:p>
+            <a:pPr>
+              <a:spcBef>
+                <a:spcPts val="400"/>
+              </a:spcBef>
+            </a:pPr>
+            <a:r>
+              <a:rPr sz="1400">
+                <a:solidFill>
+                  <a:srgbClr val="334055"/>
+                </a:solidFill>
+                <a:latin typeface="Calibri"/>
+              </a:rPr>
+              <a:t>A100 SXM 80 GB: FP16 tensor 312 TFLOPS, HBM2e 2039 GB/s → I ≈ 153 FLOP/bayt; FP32 (tensor yadrolarsiz) 19,5 TFLOPS → I ≈ 9,6. H100 SXM: FP16 989 TFLOPS, HBM3 3350 GB/s → I ≈ 295. NVIDIA T4: FP16 65 TFLOPS, GDDR6 320 GB/s → I ≈ 203. Jetson Orin AGX 64 GB: INT8 zich ~ 138 TOPS, LPDDR5 204,8 GB/s → I ≈ 670.</a:t>
+            </a:r>
+          </a:p>
         </p:txBody>
       </p:sp>
       <p:sp>
@@ -24086,12 +25340,12 @@
         </p:nvSpPr>
         <p:spPr>
           <a:xfrm>
-            <a:off x="550000" y="3835000"/>
-            <a:ext cx="11100000" cy="1147500"/>
+            <a:off x="550000" y="4636740"/>
+            <a:ext cx="11100000" cy="1503480"/>
           </a:xfrm>
           <a:prstGeom prst="roundRect">
             <a:avLst>
-              <a:gd name="adj" fmla="val 18000"/>
+              <a:gd name="adj" fmla="val 8000"/>
             </a:avLst>
           </a:prstGeom>
           <a:solidFill>
@@ -24132,8 +25386,8 @@
         </p:nvSpPr>
         <p:spPr>
           <a:xfrm>
-            <a:off x="550000" y="3835000"/>
-            <a:ext cx="70000" cy="1147500"/>
+            <a:off x="550000" y="4636740"/>
+            <a:ext cx="70000" cy="1503480"/>
           </a:xfrm>
           <a:prstGeom prst="rect">
             <a:avLst/>
@@ -24176,8 +25430,8 @@
         </p:nvSpPr>
         <p:spPr>
           <a:xfrm>
-            <a:off x="800000" y="4178750"/>
-            <a:ext cx="460000" cy="460000"/>
+            <a:off x="780000" y="5178480"/>
+            <a:ext cx="420000" cy="420000"/>
           </a:xfrm>
           <a:prstGeom prst="ellipse">
             <a:avLst/>
@@ -24210,7 +25464,7 @@
           <a:p>
             <a:pPr algn="ctr"/>
             <a:r>
-              <a:rPr sz="1600" b="1">
+              <a:rPr sz="1400" b="1">
                 <a:solidFill>
                   <a:srgbClr val="FFFFFF"/>
                 </a:solidFill>
@@ -24229,8 +25483,8 @@
         </p:nvSpPr>
         <p:spPr>
           <a:xfrm>
-            <a:off x="1450000" y="3835000"/>
-            <a:ext cx="10050000" cy="1147500"/>
+            <a:off x="1380000" y="4676740"/>
+            <a:ext cx="10150000" cy="1423480"/>
           </a:xfrm>
           <a:prstGeom prst="rect">
             <a:avLst/>
@@ -24238,198 +25492,35 @@
           <a:noFill/>
         </p:spPr>
         <p:txBody>
-          <a:bodyPr wrap="square" anchor="ctr" lIns="50800" rIns="50800">
+          <a:bodyPr wrap="square" anchor="ctr">
             <a:spAutoFit/>
           </a:bodyPr>
           <a:lstStyle/>
           <a:p>
-            <a:pPr algn="l"/>
             <a:r>
-              <a:rPr sz="1400" b="0">
+              <a:rPr sz="1500" b="1">
                 <a:solidFill>
-                  <a:srgbClr val="1B2430"/>
+                  <a:srgbClr val="1F3A5F"/>
                 </a:solidFill>
                 <a:latin typeface="Calibri"/>
               </a:rPr>
               <a:t>Endi tipik yadrolarning intensivligini baholaymiz.</a:t>
             </a:r>
           </a:p>
-        </p:txBody>
-      </p:sp>
-      <p:sp>
-        <p:nvSpPr>
-          <p:cNvPr id="22" name="Rounded Rectangle 21"/>
-          <p:cNvSpPr/>
-          <p:nvPr/>
-        </p:nvSpPr>
-        <p:spPr>
-          <a:xfrm>
-            <a:off x="550000" y="5102500"/>
-            <a:ext cx="11100000" cy="1147500"/>
-          </a:xfrm>
-          <a:prstGeom prst="roundRect">
-            <a:avLst>
-              <a:gd name="adj" fmla="val 18000"/>
-            </a:avLst>
-          </a:prstGeom>
-          <a:solidFill>
-            <a:srgbClr val="F5F8FC"/>
-          </a:solidFill>
-          <a:ln>
-            <a:noFill/>
-          </a:ln>
-          <a:effectLst/>
-        </p:spPr>
-        <p:style>
-          <a:lnRef idx="1">
-            <a:schemeClr val="accent1"/>
-          </a:lnRef>
-          <a:fillRef idx="3">
-            <a:schemeClr val="accent1"/>
-          </a:fillRef>
-          <a:effectRef idx="2">
-            <a:schemeClr val="accent1"/>
-          </a:effectRef>
-          <a:fontRef idx="minor">
-            <a:schemeClr val="lt1"/>
-          </a:fontRef>
-        </p:style>
-        <p:txBody>
-          <a:bodyPr rtlCol="0" anchor="ctr"/>
-          <a:lstStyle/>
-          <a:p>
-            <a:pPr algn="ctr"/>
-          </a:p>
-        </p:txBody>
-      </p:sp>
-      <p:sp>
-        <p:nvSpPr>
-          <p:cNvPr id="23" name="Rectangle 22"/>
-          <p:cNvSpPr/>
-          <p:nvPr/>
-        </p:nvSpPr>
-        <p:spPr>
-          <a:xfrm>
-            <a:off x="550000" y="5102500"/>
-            <a:ext cx="70000" cy="1147500"/>
-          </a:xfrm>
-          <a:prstGeom prst="rect">
-            <a:avLst/>
-          </a:prstGeom>
-          <a:solidFill>
-            <a:srgbClr val="B7791F"/>
-          </a:solidFill>
-          <a:ln>
-            <a:noFill/>
-          </a:ln>
-          <a:effectLst/>
-        </p:spPr>
-        <p:style>
-          <a:lnRef idx="1">
-            <a:schemeClr val="accent1"/>
-          </a:lnRef>
-          <a:fillRef idx="3">
-            <a:schemeClr val="accent1"/>
-          </a:fillRef>
-          <a:effectRef idx="2">
-            <a:schemeClr val="accent1"/>
-          </a:effectRef>
-          <a:fontRef idx="minor">
-            <a:schemeClr val="lt1"/>
-          </a:fontRef>
-        </p:style>
-        <p:txBody>
-          <a:bodyPr rtlCol="0" anchor="ctr"/>
-          <a:lstStyle/>
-          <a:p>
-            <a:pPr algn="ctr"/>
-          </a:p>
-        </p:txBody>
-      </p:sp>
-      <p:sp>
-        <p:nvSpPr>
-          <p:cNvPr id="24" name="Oval 23"/>
-          <p:cNvSpPr/>
-          <p:nvPr/>
-        </p:nvSpPr>
-        <p:spPr>
-          <a:xfrm>
-            <a:off x="800000" y="5446250"/>
-            <a:ext cx="460000" cy="460000"/>
-          </a:xfrm>
-          <a:prstGeom prst="ellipse">
-            <a:avLst/>
-          </a:prstGeom>
-          <a:solidFill>
-            <a:srgbClr val="B7791F"/>
-          </a:solidFill>
-          <a:ln>
-            <a:noFill/>
-          </a:ln>
-          <a:effectLst/>
-        </p:spPr>
-        <p:style>
-          <a:lnRef idx="1">
-            <a:schemeClr val="accent1"/>
-          </a:lnRef>
-          <a:fillRef idx="3">
-            <a:schemeClr val="accent1"/>
-          </a:fillRef>
-          <a:effectRef idx="2">
-            <a:schemeClr val="accent1"/>
-          </a:effectRef>
-          <a:fontRef idx="minor">
-            <a:schemeClr val="lt1"/>
-          </a:fontRef>
-        </p:style>
-        <p:txBody>
-          <a:bodyPr rtlCol="0" anchor="ctr" lIns="0" rIns="0"/>
-          <a:lstStyle/>
-          <a:p>
-            <a:pPr algn="ctr"/>
+          <a:p>
+            <a:pPr>
+              <a:spcBef>
+                <a:spcPts val="400"/>
+              </a:spcBef>
+            </a:pPr>
             <a:r>
-              <a:rPr sz="1600" b="1">
+              <a:rPr sz="1400">
                 <a:solidFill>
-                  <a:srgbClr val="FFFFFF"/>
+                  <a:srgbClr val="334055"/>
                 </a:solidFill>
                 <a:latin typeface="Calibri"/>
               </a:rPr>
-              <a:t>4</a:t>
-            </a:r>
-          </a:p>
-        </p:txBody>
-      </p:sp>
-      <p:sp>
-        <p:nvSpPr>
-          <p:cNvPr id="25" name="TextBox 24"/>
-          <p:cNvSpPr txBox="1"/>
-          <p:nvPr/>
-        </p:nvSpPr>
-        <p:spPr>
-          <a:xfrm>
-            <a:off x="1450000" y="5102500"/>
-            <a:ext cx="10050000" cy="1147500"/>
-          </a:xfrm>
-          <a:prstGeom prst="rect">
-            <a:avLst/>
-          </a:prstGeom>
-          <a:noFill/>
-        </p:spPr>
-        <p:txBody>
-          <a:bodyPr wrap="square" anchor="ctr" lIns="50800" rIns="50800">
-            <a:spAutoFit/>
-          </a:bodyPr>
-          <a:lstStyle/>
-          <a:p>
-            <a:pPr algn="l"/>
-            <a:r>
-              <a:rPr sz="1400" b="0">
-                <a:solidFill>
-                  <a:srgbClr val="1B2430"/>
-                </a:solidFill>
-                <a:latin typeface="Calibri"/>
-              </a:rPr>
-              <a:t>Roofline ikki muhim kengaytmaga ega. Birinchisi — iyerarxik Roofline: har bir xotira darajasi (L1, L2, HBM, NVLink, PCIe) uchun alohida tom chiziladi va intensivlik shu daraja uchun…</a:t>
+              <a:t>M×K va K×N matritsalarni ko'paytirish 2MNK FLOP talab qiladi va FP16'da kamida 2(MK + KN + MN) bayt o'qiydi-yozadi. Kvadrat n×n holatda I = 2n³ / 6n² = n/3: n = 1024 da I ≈ 341, n = 4096 da I ≈ 1365 — A100'da aniq compute-bound.</a:t>
             </a:r>
           </a:p>
         </p:txBody>
@@ -24451,7 +25542,7 @@
               <p:cTn id="2" dur="indefinite" nodeType="mainSeq">
                 <p:childTnLst>
                   <p:par>
-                    <p:cTn id="103" fill="hold">
+                    <p:cTn id="79" fill="hold">
                       <p:stCondLst>
                         <p:cond delay="indefinite"/>
                         <p:cond evt="onBegin" delay="0">
@@ -25559,366 +26650,6 @@
                                         <p:cTn id="78" dur="550" fill="hold"/>
                                         <p:tgtEl>
                                           <p:spTgt spid="21"/>
-                                        </p:tgtEl>
-                                        <p:attrNameLst>
-                                          <p:attrName>ppt_y</p:attrName>
-                                        </p:attrNameLst>
-                                      </p:cBhvr>
-                                      <p:tavLst>
-                                        <p:tav tm="0">
-                                          <p:val>
-                                            <p:strVal val="#ppt_y+.08"/>
-                                          </p:val>
-                                        </p:tav>
-                                        <p:tav tm="100000">
-                                          <p:val>
-                                            <p:strVal val="#ppt_y"/>
-                                          </p:val>
-                                        </p:tav>
-                                      </p:tavLst>
-                                    </p:anim>
-                                  </p:childTnLst>
-                                </p:cTn>
-                              </p:par>
-                            </p:childTnLst>
-                          </p:cTn>
-                        </p:par>
-                        <p:par>
-                          <p:cTn id="79" fill="hold">
-                            <p:stCondLst>
-                              <p:cond delay="880"/>
-                            </p:stCondLst>
-                            <p:childTnLst>
-                              <p:par>
-                                <p:cTn id="80" presetID="42" presetClass="entr" presetSubtype="0" fill="hold" grpId="0" nodeType="afterEffect">
-                                  <p:stCondLst>
-                                    <p:cond delay="0"/>
-                                  </p:stCondLst>
-                                  <p:childTnLst>
-                                    <p:set>
-                                      <p:cBhvr>
-                                        <p:cTn id="81" dur="1" fill="hold">
-                                          <p:stCondLst>
-                                            <p:cond delay="0"/>
-                                          </p:stCondLst>
-                                        </p:cTn>
-                                        <p:tgtEl>
-                                          <p:spTgt spid="22"/>
-                                        </p:tgtEl>
-                                        <p:attrNameLst>
-                                          <p:attrName>style.visibility</p:attrName>
-                                        </p:attrNameLst>
-                                      </p:cBhvr>
-                                      <p:to>
-                                        <p:strVal val="visible"/>
-                                      </p:to>
-                                    </p:set>
-                                    <p:animEffect transition="in" filter="fade">
-                                      <p:cBhvr>
-                                        <p:cTn id="82" dur="550"/>
-                                        <p:tgtEl>
-                                          <p:spTgt spid="22"/>
-                                        </p:tgtEl>
-                                      </p:cBhvr>
-                                    </p:animEffect>
-                                    <p:anim calcmode="lin" valueType="num">
-                                      <p:cBhvr additive="base">
-                                        <p:cTn id="83" dur="550" fill="hold"/>
-                                        <p:tgtEl>
-                                          <p:spTgt spid="22"/>
-                                        </p:tgtEl>
-                                        <p:attrNameLst>
-                                          <p:attrName>ppt_x</p:attrName>
-                                        </p:attrNameLst>
-                                      </p:cBhvr>
-                                      <p:tavLst>
-                                        <p:tav tm="0">
-                                          <p:val>
-                                            <p:strVal val="#ppt_x"/>
-                                          </p:val>
-                                        </p:tav>
-                                        <p:tav tm="100000">
-                                          <p:val>
-                                            <p:strVal val="#ppt_x"/>
-                                          </p:val>
-                                        </p:tav>
-                                      </p:tavLst>
-                                    </p:anim>
-                                    <p:anim calcmode="lin" valueType="num">
-                                      <p:cBhvr additive="base">
-                                        <p:cTn id="84" dur="550" fill="hold"/>
-                                        <p:tgtEl>
-                                          <p:spTgt spid="22"/>
-                                        </p:tgtEl>
-                                        <p:attrNameLst>
-                                          <p:attrName>ppt_y</p:attrName>
-                                        </p:attrNameLst>
-                                      </p:cBhvr>
-                                      <p:tavLst>
-                                        <p:tav tm="0">
-                                          <p:val>
-                                            <p:strVal val="#ppt_y+.08"/>
-                                          </p:val>
-                                        </p:tav>
-                                        <p:tav tm="100000">
-                                          <p:val>
-                                            <p:strVal val="#ppt_y"/>
-                                          </p:val>
-                                        </p:tav>
-                                      </p:tavLst>
-                                    </p:anim>
-                                  </p:childTnLst>
-                                </p:cTn>
-                              </p:par>
-                            </p:childTnLst>
-                          </p:cTn>
-                        </p:par>
-                        <p:par>
-                          <p:cTn id="85" fill="hold">
-                            <p:stCondLst>
-                              <p:cond delay="880"/>
-                            </p:stCondLst>
-                            <p:childTnLst>
-                              <p:par>
-                                <p:cTn id="86" presetID="42" presetClass="entr" presetSubtype="0" fill="hold" grpId="0" nodeType="afterEffect">
-                                  <p:stCondLst>
-                                    <p:cond delay="0"/>
-                                  </p:stCondLst>
-                                  <p:childTnLst>
-                                    <p:set>
-                                      <p:cBhvr>
-                                        <p:cTn id="87" dur="1" fill="hold">
-                                          <p:stCondLst>
-                                            <p:cond delay="0"/>
-                                          </p:stCondLst>
-                                        </p:cTn>
-                                        <p:tgtEl>
-                                          <p:spTgt spid="23"/>
-                                        </p:tgtEl>
-                                        <p:attrNameLst>
-                                          <p:attrName>style.visibility</p:attrName>
-                                        </p:attrNameLst>
-                                      </p:cBhvr>
-                                      <p:to>
-                                        <p:strVal val="visible"/>
-                                      </p:to>
-                                    </p:set>
-                                    <p:animEffect transition="in" filter="fade">
-                                      <p:cBhvr>
-                                        <p:cTn id="88" dur="550"/>
-                                        <p:tgtEl>
-                                          <p:spTgt spid="23"/>
-                                        </p:tgtEl>
-                                      </p:cBhvr>
-                                    </p:animEffect>
-                                    <p:anim calcmode="lin" valueType="num">
-                                      <p:cBhvr additive="base">
-                                        <p:cTn id="89" dur="550" fill="hold"/>
-                                        <p:tgtEl>
-                                          <p:spTgt spid="23"/>
-                                        </p:tgtEl>
-                                        <p:attrNameLst>
-                                          <p:attrName>ppt_x</p:attrName>
-                                        </p:attrNameLst>
-                                      </p:cBhvr>
-                                      <p:tavLst>
-                                        <p:tav tm="0">
-                                          <p:val>
-                                            <p:strVal val="#ppt_x"/>
-                                          </p:val>
-                                        </p:tav>
-                                        <p:tav tm="100000">
-                                          <p:val>
-                                            <p:strVal val="#ppt_x"/>
-                                          </p:val>
-                                        </p:tav>
-                                      </p:tavLst>
-                                    </p:anim>
-                                    <p:anim calcmode="lin" valueType="num">
-                                      <p:cBhvr additive="base">
-                                        <p:cTn id="90" dur="550" fill="hold"/>
-                                        <p:tgtEl>
-                                          <p:spTgt spid="23"/>
-                                        </p:tgtEl>
-                                        <p:attrNameLst>
-                                          <p:attrName>ppt_y</p:attrName>
-                                        </p:attrNameLst>
-                                      </p:cBhvr>
-                                      <p:tavLst>
-                                        <p:tav tm="0">
-                                          <p:val>
-                                            <p:strVal val="#ppt_y+.08"/>
-                                          </p:val>
-                                        </p:tav>
-                                        <p:tav tm="100000">
-                                          <p:val>
-                                            <p:strVal val="#ppt_y"/>
-                                          </p:val>
-                                        </p:tav>
-                                      </p:tavLst>
-                                    </p:anim>
-                                  </p:childTnLst>
-                                </p:cTn>
-                              </p:par>
-                            </p:childTnLst>
-                          </p:cTn>
-                        </p:par>
-                        <p:par>
-                          <p:cTn id="91" fill="hold">
-                            <p:stCondLst>
-                              <p:cond delay="880"/>
-                            </p:stCondLst>
-                            <p:childTnLst>
-                              <p:par>
-                                <p:cTn id="92" presetID="53" presetClass="entr" presetSubtype="16" fill="hold" grpId="0" nodeType="afterEffect">
-                                  <p:stCondLst>
-                                    <p:cond delay="0"/>
-                                  </p:stCondLst>
-                                  <p:childTnLst>
-                                    <p:set>
-                                      <p:cBhvr>
-                                        <p:cTn id="93" dur="1" fill="hold">
-                                          <p:stCondLst>
-                                            <p:cond delay="0"/>
-                                          </p:stCondLst>
-                                        </p:cTn>
-                                        <p:tgtEl>
-                                          <p:spTgt spid="24"/>
-                                        </p:tgtEl>
-                                        <p:attrNameLst>
-                                          <p:attrName>style.visibility</p:attrName>
-                                        </p:attrNameLst>
-                                      </p:cBhvr>
-                                      <p:to>
-                                        <p:strVal val="visible"/>
-                                      </p:to>
-                                    </p:set>
-                                    <p:animEffect transition="in" filter="fade">
-                                      <p:cBhvr>
-                                        <p:cTn id="94" dur="550"/>
-                                        <p:tgtEl>
-                                          <p:spTgt spid="24"/>
-                                        </p:tgtEl>
-                                      </p:cBhvr>
-                                    </p:animEffect>
-                                    <p:anim calcmode="lin" valueType="num">
-                                      <p:cBhvr additive="base">
-                                        <p:cTn id="95" dur="550" fill="hold"/>
-                                        <p:tgtEl>
-                                          <p:spTgt spid="24"/>
-                                        </p:tgtEl>
-                                        <p:attrNameLst>
-                                          <p:attrName>ppt_w</p:attrName>
-                                        </p:attrNameLst>
-                                      </p:cBhvr>
-                                      <p:tavLst>
-                                        <p:tav tm="0">
-                                          <p:val>
-                                            <p:strVal val="0"/>
-                                          </p:val>
-                                        </p:tav>
-                                        <p:tav tm="100000">
-                                          <p:val>
-                                            <p:strVal val="#ppt_w"/>
-                                          </p:val>
-                                        </p:tav>
-                                      </p:tavLst>
-                                    </p:anim>
-                                    <p:anim calcmode="lin" valueType="num">
-                                      <p:cBhvr additive="base">
-                                        <p:cTn id="96" dur="550" fill="hold"/>
-                                        <p:tgtEl>
-                                          <p:spTgt spid="24"/>
-                                        </p:tgtEl>
-                                        <p:attrNameLst>
-                                          <p:attrName>ppt_h</p:attrName>
-                                        </p:attrNameLst>
-                                      </p:cBhvr>
-                                      <p:tavLst>
-                                        <p:tav tm="0">
-                                          <p:val>
-                                            <p:strVal val="0"/>
-                                          </p:val>
-                                        </p:tav>
-                                        <p:tav tm="100000">
-                                          <p:val>
-                                            <p:strVal val="#ppt_h"/>
-                                          </p:val>
-                                        </p:tav>
-                                      </p:tavLst>
-                                    </p:anim>
-                                  </p:childTnLst>
-                                </p:cTn>
-                              </p:par>
-                            </p:childTnLst>
-                          </p:cTn>
-                        </p:par>
-                        <p:par>
-                          <p:cTn id="97" fill="hold">
-                            <p:stCondLst>
-                              <p:cond delay="880"/>
-                            </p:stCondLst>
-                            <p:childTnLst>
-                              <p:par>
-                                <p:cTn id="98" presetID="42" presetClass="entr" presetSubtype="0" fill="hold" grpId="0" nodeType="afterEffect">
-                                  <p:stCondLst>
-                                    <p:cond delay="0"/>
-                                  </p:stCondLst>
-                                  <p:childTnLst>
-                                    <p:set>
-                                      <p:cBhvr>
-                                        <p:cTn id="99" dur="1" fill="hold">
-                                          <p:stCondLst>
-                                            <p:cond delay="0"/>
-                                          </p:stCondLst>
-                                        </p:cTn>
-                                        <p:tgtEl>
-                                          <p:spTgt spid="25"/>
-                                        </p:tgtEl>
-                                        <p:attrNameLst>
-                                          <p:attrName>style.visibility</p:attrName>
-                                        </p:attrNameLst>
-                                      </p:cBhvr>
-                                      <p:to>
-                                        <p:strVal val="visible"/>
-                                      </p:to>
-                                    </p:set>
-                                    <p:animEffect transition="in" filter="fade">
-                                      <p:cBhvr>
-                                        <p:cTn id="100" dur="550"/>
-                                        <p:tgtEl>
-                                          <p:spTgt spid="25"/>
-                                        </p:tgtEl>
-                                      </p:cBhvr>
-                                    </p:animEffect>
-                                    <p:anim calcmode="lin" valueType="num">
-                                      <p:cBhvr additive="base">
-                                        <p:cTn id="101" dur="550" fill="hold"/>
-                                        <p:tgtEl>
-                                          <p:spTgt spid="25"/>
-                                        </p:tgtEl>
-                                        <p:attrNameLst>
-                                          <p:attrName>ppt_x</p:attrName>
-                                        </p:attrNameLst>
-                                      </p:cBhvr>
-                                      <p:tavLst>
-                                        <p:tav tm="0">
-                                          <p:val>
-                                            <p:strVal val="#ppt_x"/>
-                                          </p:val>
-                                        </p:tav>
-                                        <p:tav tm="100000">
-                                          <p:val>
-                                            <p:strVal val="#ppt_x"/>
-                                          </p:val>
-                                        </p:tav>
-                                      </p:tavLst>
-                                    </p:anim>
-                                    <p:anim calcmode="lin" valueType="num">
-                                      <p:cBhvr additive="base">
-                                        <p:cTn id="102" dur="550" fill="hold"/>
-                                        <p:tgtEl>
-                                          <p:spTgt spid="25"/>
                                         </p:tgtEl>
                                         <p:attrNameLst>
                                           <p:attrName>ppt_y</p:attrName>
@@ -25981,10 +26712,6 @@
       <p:bldP spid="19" grpId="0" animBg="1"/>
       <p:bldP spid="20" grpId="0" animBg="1"/>
       <p:bldP spid="21" grpId="0" animBg="1"/>
-      <p:bldP spid="22" grpId="0" animBg="1"/>
-      <p:bldP spid="23" grpId="0" animBg="1"/>
-      <p:bldP spid="24" grpId="0" animBg="1"/>
-      <p:bldP spid="25" grpId="0" animBg="1"/>
     </p:bldLst>
   </p:timing>
 </p:sld>
